--- a/en/slides/10-Computer_Architecture-Electronics.pptx
+++ b/en/slides/10-Computer_Architecture-Electronics.pptx
@@ -126,13 +126,13 @@
   <p:extLst>
     <p:ext uri="{521415D9-36F7-43E2-AB2F-B90AF26B5E84}">
       <p14:sectionLst xmlns:p14="http://schemas.microsoft.com/office/powerpoint/2010/main">
-        <p14:section name="Opening" id="{ed4b6f61-db19-7456-3a07-aa3839b099e3}">
+        <p14:section name="Opening" id="{c10dffc4-8243-939a-3162-6c78ac1b517d}">
           <p14:sldIdLst>
             <p14:sldId id="256"/>
             <p14:sldId id="257"/>
           </p14:sldIdLst>
         </p14:section>
-        <p14:section name="Electricity in four quantities" id="{07f65772-8b9f-1b10-07a8-73d4a12db1bc}">
+        <p14:section name="Electricity in four quantities" id="{fd63e510-a67d-4e0b-a043-ee566fd9ec07}">
           <p14:sldIdLst>
             <p14:sldId id="258"/>
             <p14:sldId id="259"/>
@@ -140,14 +140,14 @@
             <p14:sldId id="261"/>
           </p14:sldIdLst>
         </p14:section>
-        <p14:section name="Semiconductors" id="{5d65bff4-1240-47c9-948c-6f06dc5ca536}">
+        <p14:section name="Semiconductors" id="{c20ec663-1161-edf6-8572-4863ae2f6b35}">
           <p14:sldIdLst>
             <p14:sldId id="262"/>
             <p14:sldId id="263"/>
             <p14:sldId id="264"/>
           </p14:sldIdLst>
         </p14:section>
-        <p14:section name="From volts to bits" id="{97eb7699-671e-0b18-d333-574cc02b5075}">
+        <p14:section name="From volts to bits" id="{d1917262-44af-4127-870e-27d7d33d4c67}">
           <p14:sldIdLst>
             <p14:sldId id="265"/>
             <p14:sldId id="266"/>
@@ -157,7 +157,7 @@
             <p14:sldId id="270"/>
           </p14:sldIdLst>
         </p14:section>
-        <p14:section name="Back to the machine" id="{ba72cfb9-081b-c881-c923-d1f041ead394}">
+        <p14:section name="Back to the machine" id="{fd77f89e-3efd-d3a0-6e89-8c51d9c5534b}">
           <p14:sldIdLst>
             <p14:sldId id="271"/>
             <p14:sldId id="272"/>
@@ -3294,7 +3294,63 @@
       </p:sp>
       <p:sp>
         <p:nvSpPr>
-          <p:cNvPr id="12" name="Shape 10"/>
+          <p:cNvPr id="12" name="Text 10"/>
+          <p:cNvSpPr txBox="1"/>
+          <p:nvPr/>
+        </p:nvSpPr>
+        <p:spPr>
+          <a:xfrm>
+            <a:off x="4693615" y="566928"/>
+            <a:ext cx="6949440" cy="640080"/>
+          </a:xfrm>
+          <a:prstGeom prst="rect">
+            <a:avLst/>
+          </a:prstGeom>
+          <a:noFill/>
+          <a:ln/>
+        </p:spPr>
+        <p:txBody>
+          <a:bodyPr wrap="square" lIns="0" tIns="0" rIns="0" bIns="0" rtlCol="0" anchor="t"/>
+          <a:lstStyle/>
+          <a:p>
+            <a:pPr algn="r" indent="0" marL="0">
+              <a:buNone/>
+            </a:pPr>
+            <a:r>
+              <a:rPr lang="en-US" sz="1300" dirty="0">
+                <a:solidFill>
+                  <a:srgbClr val="CFE3EA"/>
+                </a:solidFill>
+                <a:latin typeface="Calibri" pitchFamily="34" charset="0"/>
+                <a:ea typeface="Calibri" pitchFamily="34" charset="-122"/>
+                <a:cs typeface="Calibri" pitchFamily="34" charset="-120"/>
+              </a:rPr>
+              <a:t>Lecture deck. The listings, the complete program and how to test it are in the code deck:</a:t>
+            </a:r>
+            <a:endParaRPr lang="en-US" sz="1300" dirty="0"/>
+          </a:p>
+          <a:p>
+            <a:pPr algn="r" indent="0" marL="0">
+              <a:buNone/>
+            </a:pPr>
+            <a:r>
+              <a:rPr lang="en-US" sz="1300" dirty="0">
+                <a:solidFill>
+                  <a:srgbClr val="CFE3EA"/>
+                </a:solidFill>
+                <a:latin typeface="Calibri" pitchFamily="34" charset="0"/>
+                <a:ea typeface="Calibri" pitchFamily="34" charset="-122"/>
+                <a:cs typeface="Calibri" pitchFamily="34" charset="-120"/>
+              </a:rPr>
+              <a:t>10-Computer_Architecture-Electronics-Code.pptx</a:t>
+            </a:r>
+            <a:endParaRPr lang="en-US" sz="1300" dirty="0"/>
+          </a:p>
+        </p:txBody>
+      </p:sp>
+      <p:sp>
+        <p:nvSpPr>
+          <p:cNvPr id="13" name="Shape 11"/>
           <p:cNvSpPr/>
           <p:nvPr/>
         </p:nvSpPr>
@@ -3321,7 +3377,7 @@
       </p:sp>
       <p:pic>
         <p:nvPicPr>
-          <p:cNvPr id="13" name="Image 0" descr="/Users/raffaelemontella/devel/riscv-prg32/computer-architecture-with-prg32/tools/assets/kit_breadboard.png">    </p:cNvPr>
+          <p:cNvPr id="14" name="Image 0" descr="/Users/raffaelemontella/devel/riscv-prg32/computer-architecture-with-prg32/tools/assets/kit_breadboard.png">    </p:cNvPr>
           <p:cNvPicPr>
             <a:picLocks noChangeAspect="1"/>
           </p:cNvPicPr>

--- a/en/slides/10-Computer_Architecture-Electronics.pptx
+++ b/en/slides/10-Computer_Architecture-Electronics.pptx
@@ -126,13 +126,13 @@
   <p:extLst>
     <p:ext uri="{521415D9-36F7-43E2-AB2F-B90AF26B5E84}">
       <p14:sectionLst xmlns:p14="http://schemas.microsoft.com/office/powerpoint/2010/main">
-        <p14:section name="Opening" id="{c10dffc4-8243-939a-3162-6c78ac1b517d}">
+        <p14:section name="Opening" id="{17616a14-e725-c054-e1c8-21a3043127b0}">
           <p14:sldIdLst>
             <p14:sldId id="256"/>
             <p14:sldId id="257"/>
           </p14:sldIdLst>
         </p14:section>
-        <p14:section name="Electricity in four quantities" id="{fd63e510-a67d-4e0b-a043-ee566fd9ec07}">
+        <p14:section name="Electricity in four quantities" id="{d0b34115-2d93-543b-2aa5-3370a0a1497b}">
           <p14:sldIdLst>
             <p14:sldId id="258"/>
             <p14:sldId id="259"/>
@@ -140,14 +140,14 @@
             <p14:sldId id="261"/>
           </p14:sldIdLst>
         </p14:section>
-        <p14:section name="Semiconductors" id="{c20ec663-1161-edf6-8572-4863ae2f6b35}">
+        <p14:section name="Semiconductors" id="{69ec1a51-0633-41e3-4ab2-9d73b0d6ec0d}">
           <p14:sldIdLst>
             <p14:sldId id="262"/>
             <p14:sldId id="263"/>
             <p14:sldId id="264"/>
           </p14:sldIdLst>
         </p14:section>
-        <p14:section name="From volts to bits" id="{d1917262-44af-4127-870e-27d7d33d4c67}">
+        <p14:section name="From volts to bits" id="{f618e2d9-7316-3de7-b192-2cba25bd11ce}">
           <p14:sldIdLst>
             <p14:sldId id="265"/>
             <p14:sldId id="266"/>
@@ -157,7 +157,7 @@
             <p14:sldId id="270"/>
           </p14:sldIdLst>
         </p14:section>
-        <p14:section name="Back to the machine" id="{fd77f89e-3efd-d3a0-6e89-8c51d9c5534b}">
+        <p14:section name="Back to the machine" id="{337e7e0e-9215-d6c5-17d7-5a009e2f706a}">
           <p14:sldIdLst>
             <p14:sldId id="271"/>
             <p14:sldId id="272"/>
@@ -571,6 +571,8 @@
             <a:r>
               <a:rPr lang="en-US" dirty="0"/>
               <a:t>So far a gate has been a symbol and a truth table. This lecture gives it a body. It follows one bit, the bit of a button of the kit, from the finger that presses it to the register that your program reads, and along the way explains what a volt is, what a transistor does, and how two transistors make a NOT. No previous knowledge of physics is assumed. The quotation by Clarke is the feeling to dispel: a chip looks like magic only until you see what it is made of.
+Learning status: UNDERSTAND NOW, by the end of this lecture you explain it, trace it and apply it on your own; USE NOW, you follow and use the recipe today; how it works inside is explained later, or is not part of the course; UNDERSTAND LATER, recognise the name and what it is for; a later lecture explains it. A slide without a badge is context: a story, an example, a question, an exercise.
+Learning status of this lecture. UNDERSTAND NOW: pull-up inputs; voltage, current, Ohm's law; the transistor as a switch; from volts to bits; CMOS gates. USE NOW: the complete program, the PRG32 tools (used, not studied, in this course). UNDERSTAND LATER: the clock (Lecture 13). A slide without a badge is context: a story, an example, a question, an exercise.
 For the lecturer: New lecture for 2026/27, placed between Boolean algebra and combinational machines. It gives the gates of Lectures 08 and 09 a physical body before Lecture 11 composes them into machines. Spiral: the button of the kit, read since the first labs, is followed from the finger to the bit. No previous knowledge of physics is assumed; numbers for the kit are from the ESP32-C6 datasheet (table 5-4) and from the PRG32 hardware documentation.</a:t>
             </a:r>
             <a:endParaRPr lang="en-US" dirty="0"/>
@@ -660,6 +662,7 @@
             <a:r>
               <a:rPr lang="en-US" dirty="0"/>
               <a:t>A digital circuit does not use exact voltages: it uses two ranges. The figure shows them for the kit. An output guarantees clean levels: above 2.64 V for a 1, below 0.33 V for a 0. An input is more tolerant: it reads 1 above 2.475 V and 0 below 0.825 V. The difference between what an output guarantees and what an input requires is the noise margin: a disturbance smaller than that cannot change the bit. Between the two input thresholds the value is undefined, and signals must cross that band quickly.
+UNDERSTAND NOW: from volts to bits.
 For the lecturer: ESP32-C6 datasheet, table 5-4, with VDD = 3.3 V: VOH min 0.8 VDD, VOL max 0.1 VDD, VIH min 0.75 VDD, VIL max 0.25 VDD. Noise margins: 2.64 - 2.475 = 0.165 V high, 0.825 - 0.33 = 0.495 V low. This is the threshold 'half of the supply voltage' of Lecture 13, made precise.</a:t>
             </a:r>
             <a:endParaRPr lang="en-US" dirty="0"/>
@@ -749,6 +752,7 @@
             <a:r>
               <a:rPr lang="en-US" dirty="0"/>
               <a:t>Why give up the richness of analog signals? In an analog circuit the exact value is the information, so every stage adds a little noise, and the noise accumulates: each copy is worse than the previous one. In a digital circuit only the range matters, and every gate produces a fresh, clean level: noise does not accumulate, copies are perfect, and errors can even be detected and corrected. Analog circuits remain indispensable at the edges of a system, where it touches the world: sensors, radio, sound.
+UNDERSTAND NOW: from volts to bits.
 For the lecturer: The analog-to-digital story of Lecture 04, seen from the wire. The audio amplifier and the radio of the kit are the analog edges of an otherwise digital system.</a:t>
             </a:r>
             <a:endParaRPr lang="en-US" dirty="0"/>
@@ -838,6 +842,7 @@
             <a:r>
               <a:rPr lang="en-US" dirty="0"/>
               <a:t>The first gate. One pMOS connects the output to the supply, one nMOS connects it to ground, and both gates are driven by the same input. With the input at 0 the pMOS conducts and the output is 1; with the input at 1 the nMOS conducts and the output is 0. It is a NOT. Exactly one of the two transistors conducts at any time, so no current flows from supply to ground when the input is still: this is why CMOS consumes almost nothing at rest.
+UNDERSTAND NOW: CMOS gates.
 For the lecturer: CMOS: complementary MOS. Y = A'. The pull-up network (pMOS) and the pull-down network (nMOS) are each other's dual, as in the duality principle of Lecture 08.</a:t>
             </a:r>
             <a:endParaRPr lang="en-US" dirty="0"/>
@@ -927,6 +932,7 @@
             <a:r>
               <a:rPr lang="en-US" dirty="0"/>
               <a:t>Two inputs, four transistors. In the NAND the two nMOS are in series: the output reaches ground only if A and B are both 1. The two pMOS are in parallel: the output reaches the supply if either input is 0. Series is AND, parallel is OR. The NOR is the dual: series and parallel are exchanged, exactly as De Morgan's laws exchange AND and OR. Check both drawings yourself for the four combinations of the inputs, marking which transistors conduct.
+UNDERSTAND NOW: CMOS gates.
 For the lecturer: Series is AND, parallel is OR: the switching-circuit idea of Nakajima and Shannon (Lecture 03). Four transistors each. Ask the class to check the four input combinations on the drawing.</a:t>
             </a:r>
             <a:endParaRPr lang="en-US" dirty="0"/>
@@ -1016,6 +1022,7 @@
             <a:r>
               <a:rPr lang="en-US" dirty="0"/>
               <a:t>The cost of circuits in transistors. A NOT costs 2, a NAND or a NOR 4, an AND or an OR 6, because they are a NAND or a NOR followed by an inverter. This reverses the intuition of the algebra: in CMOS the inverting gates come first, and an AND is more expensive than a NAND. A full adder needs about 28 transistors, a memory cell 6, a flip-flop about 20. Now the purpose of minimisation is concrete: fewer literals mean fewer transistors, less area, less energy and less time.
+UNDERSTAND NOW: CMOS gates.
 For the lecturer: This is why NAND is the universal gate of Lecture 09 in practice as well as in theory: an AND costs more than a NAND. Counts are for conventional static CMOS and vary with the design style. Thirty-two full adders: about 900 transistors for the adder behind the add instruction.</a:t>
             </a:r>
             <a:endParaRPr lang="en-US" dirty="0"/>
@@ -1105,6 +1112,7 @@
             <a:r>
               <a:rPr lang="en-US" dirty="0"/>
               <a:t>The output of a gate drives the inputs of other gates, which are small capacitors. To change level it must charge or discharge them through the resistance of its own transistors, and this takes time: the propagation delay. It also takes energy, at every change of level. The power spent in switching is about C times V squared times f: the capacitance, the square of the supply voltage, and the frequency. Lowering the voltage saves the most, which is why chips moved from 5 V to about 1 V inside. Speed is paid for in heat.
+UNDERSTAND NOW: CMOS gates. UNDERSTAND LATER: the clock (studied in Lecture 13).
 For the lecturer: C the switched capacitance, V the supply, f the switching frequency. The propagation delay returns in Lecture 11 as the critical path, and in Lecture 13 as the reason for the clock. The ESP32-C6 has a 3.3 V supply for its pins and a lower internal voltage for its logic.</a:t>
             </a:r>
             <a:endParaRPr lang="en-US" dirty="0"/>
@@ -1194,6 +1202,7 @@
             <a:r>
               <a:rPr lang="en-US" dirty="0"/>
               <a:t>An input connected to nothing is floating: it picks up noise and reads 0 or 1 at random. The remedy is a pull-up resistor that ties the pin to 3.3 V. With the button released no current flows, and the pin reads a clean 1. With the button pressed the switch joins the pin to ground: 0 V, a clean 0, and a negligible current of 73 microamperes flows through the resistor. It is a voltage divider whose lower resistor is either infinite or zero. The firmware then inverts the bit, so that in your program pressed is 1.
+UNDERSTAND NOW: pull-up inputs.
 For the lecturer: Internal weak pull-up of the ESP32-C6: 45 kΩ typical (datasheet). The firmware enables it on every button pin (prg32_input.c) and reads the pins inverted (prg32_controller.c). The triangle is the input buffer of the pin. This is called active-low logic.</a:t>
             </a:r>
             <a:endParaRPr lang="en-US" dirty="0"/>
@@ -1641,6 +1650,7 @@
             <a:r>
               <a:rPr lang="en-US" dirty="0"/>
               <a:t>Five conclusions. Voltage pushes, current flows, resistance hinders, and Ohm's law covers most of what a digital designer needs. A MOS transistor is a switch controlled by a voltage, in two complementary types. A bit is a range of voltages, made reliable by noise margins and by the regeneration of levels. CMOS gates are pairs of switch networks, and the inverting ones are the cheapest. Switching costs time and energy. The next lecture builds machines out of these gates.
+Learning status, recap. UNDERSTAND NOW: pull-up inputs; voltage, current, Ohm's law; the transistor as a switch; from volts to bits; CMOS gates. USE NOW: the complete program, the PRG32 tools (used, not studied, in this course). UNDERSTAND LATER: the clock (Lecture 13). A slide without a badge is context: a story, an example, a question, an exercise.
 For the lecturer: Next lecture: combinational machines, built from these gates.</a:t>
             </a:r>
             <a:endParaRPr lang="en-US" dirty="0"/>
@@ -1730,6 +1740,7 @@
             <a:r>
               <a:rPr lang="en-US" dirty="0"/>
               <a:t>Four quantities, with the analogy of water in pipes. Voltage is the pressure that pushes; it is measured in volts and always between two points. Current is the flow, in amperes. Resistance is what hinders the flow, in ohms. Power is the work done each second, in watts. The last column ties each to the kit: 3.3 V of supply, about 10 mA through a lit LED, 45 kΩ inside each input pin. Remember the caption: when we say that a pin "is at 3.3 V", we mean with respect to ground, the common reference.
+UNDERSTAND NOW: voltage, current, Ohm's law.
 For the lecturer: Electric charge is carried by electrons; current is charge per second. A voltage is always between two points: when we say 'the pin is at 3.3 V' we mean with respect to ground, the common reference of the whole circuit. Prefixes: milli (m) 10^-3, micro (µ) 10^-6, kilo (k) 10^3, mega (M) 10^6.</a:t>
             </a:r>
             <a:endParaRPr lang="en-US" dirty="0"/>
@@ -1819,6 +1830,7 @@
             <a:r>
               <a:rPr lang="en-US" dirty="0"/>
               <a:t>Ohm's law: the voltage across a resistor equals its resistance times the current through it. A circuit is a closed loop, and the drawing shows the simplest useful one: a supply, a resistor and an LED. The LED keeps about 2 V for itself; the resistor takes the remaining 1.3 V and thereby fixes the current. For 10 mA you need 1.3 divided by 0.010, that is 130 Ω, and the nearest standard value is 150 Ω. Without the resistor the current would be far too large and the LED would burn.
+UNDERSTAND NOW: voltage, current, Ohm's law.
 For the lecturer: Georg Ohm, 1827. The forward voltage of an LED depends on its colour: about 1.8-2.2 V for red, about 3 V for blue and white. With 150 Ω the current is 1.3 / 150 = 8.7 mA.</a:t>
             </a:r>
             <a:endParaRPr lang="en-US" dirty="0"/>
@@ -1908,6 +1920,7 @@
             <a:r>
               <a:rPr lang="en-US" dirty="0"/>
               <a:t>Two ways of connecting resistors. In series the same current crosses both and the resistances add. In parallel the same voltage is across both and the total resistance is smaller than either. Two resistors in series form a voltage divider: the output, taken between them, is the supply multiplied by R2 over R1 plus R2. With equal resistors it is half the supply; if R2 is much smaller, the output is close to ground. Keep the divider in mind: it explains the button at the end of the lecture.
+UNDERSTAND NOW: voltage, current, Ohm's law.
 For the lecturer: The divider is the key to the pull-up circuit at the end of the lecture: a button is a resistor that is either infinite (open) or nearly zero (closed). Parallel: 1/R = 1/R1 + 1/R2.</a:t>
             </a:r>
             <a:endParaRPr lang="en-US" dirty="0"/>
@@ -1997,6 +2010,7 @@
             <a:r>
               <a:rPr lang="en-US" dirty="0"/>
               <a:t>A capacitor stores charge as a tank stores water, and its voltage cannot change instantly: it has to be filled or emptied through a resistance. The time needed is of the order of R times C. For an input pin of the kit, 45 kΩ times 2 pF is 90 nanoseconds. Every wire and every input of a transistor is a small capacitor, and this is where the delay of a gate comes from. A capacitor that is charged or empty is also a way of storing one bit: you will meet it again in the memory lecture.
+UNDERSTAND NOW: voltage, current, Ohm's law.
 For the lecturer: RC is the time constant: after RC the voltage has covered about 63% of the way. Pin capacitance of the ESP32-C6: 2 pF typical (datasheet). Wiring and the button add more, so the real figure is larger.</a:t>
             </a:r>
             <a:endParaRPr lang="en-US" dirty="0"/>
@@ -2086,6 +2100,7 @@
             <a:r>
               <a:rPr lang="en-US" dirty="0"/>
               <a:t>Conductors let charge flow; insulators do not. Semiconductors lie in between, and their conduction can be controlled. The control is obtained by doping: adding a few atoms of another element. In n-type silicon there are extra electrons, negative carriers; in p-type silicon there are missing electrons, called holes, which behave as positive carriers. Where a p region meets an n region there is a junction. A chip is a slice of silicon with billions of such regions, connected by layers of metal.
+UNDERSTAND NOW: the transistor as a switch.
 For the lecturer: Silicon is the second most abundant element in the Earth's crust: sand. The whole industry rests on purifying it and doping it with extreme precision.</a:t>
             </a:r>
             <a:endParaRPr lang="en-US" dirty="0"/>
@@ -2175,6 +2190,7 @@
             <a:r>
               <a:rPr lang="en-US" dirty="0"/>
               <a:t>The history of the switch without moving parts, in six dates. The transistor of 1947 replaces the vacuum tube. The integrated circuit of 1958 puts several transistors on one piece of semiconductor. The MOS transistor of 1960 is small, simple to build and needs almost no control current. CMOS, in 1963, combines two complementary types so that power is drawn only when switching. In 1971 a whole processor fits on a chip with 2,300 transistors; today a chip holds tens of billions.
+UNDERSTAND NOW: the transistor as a switch.
 For the lecturer: A transistor is a device with three terminals in which a small signal on one controls the current between the other two. Used as an amplifier it made the radio portable; used as a switch it made the computer. Vacuum tubes and relays did the same job in the first computers of Lecture 03, a million times larger and slower.</a:t>
             </a:r>
             <a:endParaRPr lang="en-US" dirty="0"/>
@@ -2264,6 +2280,7 @@
             <a:r>
               <a:rPr lang="en-US" dirty="0"/>
               <a:t>A MOS transistor has three terminals: the gate controls whether current can pass between the other two, the source and the drain. There are two types, and the table says everything: an nMOS conducts when its gate is high; a pMOS conducts when its gate is low. They are complementary: what closes one opens the other. The gate is insulated, so it draws practically no current. One more fact will be needed shortly: an nMOS is good at connecting to ground, a pMOS at connecting to the supply.
+UNDERSTAND NOW: the transistor as a switch.
 For the lecturer: MOS: metal, oxide, semiconductor, the three layers of the gate. The small circle on the pMOS gate means, as on logic symbols, 'active when low'. Input current of an ESP32-C6 pin: at most 50 nA (datasheet).</a:t>
             </a:r>
             <a:endParaRPr lang="en-US" dirty="0"/>
@@ -3401,6 +3418,420 @@
       </p:pic>
       <p:sp>
         <p:nvSpPr>
+          <p:cNvPr id="15" name="Shape 12"/>
+          <p:cNvSpPr/>
+          <p:nvPr/>
+        </p:nvSpPr>
+        <p:spPr>
+          <a:xfrm>
+            <a:off x="9690303" y="91440"/>
+            <a:ext cx="1952752" cy="274320"/>
+          </a:xfrm>
+          <a:prstGeom prst="rect">
+            <a:avLst/>
+          </a:prstGeom>
+          <a:solidFill>
+            <a:srgbClr val="F3E8FF"/>
+          </a:solidFill>
+          <a:ln w="12700">
+            <a:solidFill>
+              <a:srgbClr val="7E22CE"/>
+            </a:solidFill>
+            <a:prstDash val="dash"/>
+          </a:ln>
+        </p:spPr>
+      </p:sp>
+      <p:sp>
+        <p:nvSpPr>
+          <p:cNvPr id="16" name="Shape 13"/>
+          <p:cNvSpPr/>
+          <p:nvPr/>
+        </p:nvSpPr>
+        <p:spPr>
+          <a:xfrm>
+            <a:off x="9717735" y="128016"/>
+            <a:ext cx="45720" cy="45720"/>
+          </a:xfrm>
+          <a:prstGeom prst="rect">
+            <a:avLst/>
+          </a:prstGeom>
+          <a:solidFill>
+            <a:srgbClr val="7E22CE"/>
+          </a:solidFill>
+          <a:ln w="12700">
+            <a:solidFill>
+              <a:srgbClr val="7E22CE"/>
+            </a:solidFill>
+            <a:prstDash val="solid"/>
+          </a:ln>
+        </p:spPr>
+      </p:sp>
+      <p:sp>
+        <p:nvSpPr>
+          <p:cNvPr id="17" name="Shape 14"/>
+          <p:cNvSpPr/>
+          <p:nvPr/>
+        </p:nvSpPr>
+        <p:spPr>
+          <a:xfrm>
+            <a:off x="9717735" y="205740"/>
+            <a:ext cx="45720" cy="45720"/>
+          </a:xfrm>
+          <a:prstGeom prst="rect">
+            <a:avLst/>
+          </a:prstGeom>
+          <a:solidFill>
+            <a:srgbClr val="7E22CE"/>
+          </a:solidFill>
+          <a:ln w="12700">
+            <a:solidFill>
+              <a:srgbClr val="7E22CE"/>
+            </a:solidFill>
+            <a:prstDash val="solid"/>
+          </a:ln>
+        </p:spPr>
+      </p:sp>
+      <p:sp>
+        <p:nvSpPr>
+          <p:cNvPr id="18" name="Shape 15"/>
+          <p:cNvSpPr/>
+          <p:nvPr/>
+        </p:nvSpPr>
+        <p:spPr>
+          <a:xfrm>
+            <a:off x="9717735" y="283464"/>
+            <a:ext cx="45720" cy="45720"/>
+          </a:xfrm>
+          <a:prstGeom prst="rect">
+            <a:avLst/>
+          </a:prstGeom>
+          <a:solidFill>
+            <a:srgbClr val="7E22CE"/>
+          </a:solidFill>
+          <a:ln w="12700">
+            <a:solidFill>
+              <a:srgbClr val="7E22CE"/>
+            </a:solidFill>
+            <a:prstDash val="solid"/>
+          </a:ln>
+        </p:spPr>
+      </p:sp>
+      <p:pic>
+        <p:nvPicPr>
+          <p:cNvPr id="19" name="Image 1" descr="preencoded.png">    </p:cNvPr>
+          <p:cNvPicPr>
+            <a:picLocks noChangeAspect="1"/>
+          </p:cNvPicPr>
+          <p:nvPr/>
+        </p:nvPicPr>
+        <p:blipFill>
+          <a:blip r:embed="rId2"/>
+          <a:stretch>
+            <a:fillRect/>
+          </a:stretch>
+        </p:blipFill>
+        <p:spPr>
+          <a:xfrm>
+            <a:off x="9818319" y="128016"/>
+            <a:ext cx="201168" cy="201168"/>
+          </a:xfrm>
+          <a:prstGeom prst="rect">
+            <a:avLst/>
+          </a:prstGeom>
+        </p:spPr>
+      </p:pic>
+      <p:sp>
+        <p:nvSpPr>
+          <p:cNvPr id="20" name="Text 16"/>
+          <p:cNvSpPr txBox="1"/>
+          <p:nvPr/>
+        </p:nvSpPr>
+        <p:spPr>
+          <a:xfrm>
+            <a:off x="10074351" y="91440"/>
+            <a:ext cx="1532128" cy="274320"/>
+          </a:xfrm>
+          <a:prstGeom prst="rect">
+            <a:avLst/>
+          </a:prstGeom>
+          <a:noFill/>
+          <a:ln/>
+        </p:spPr>
+        <p:txBody>
+          <a:bodyPr wrap="square" lIns="0" tIns="0" rIns="0" bIns="0" rtlCol="0" anchor="ctr"/>
+          <a:lstStyle/>
+          <a:p>
+            <a:pPr indent="0" marL="0">
+              <a:buNone/>
+            </a:pPr>
+            <a:r>
+              <a:rPr lang="en-US" sz="1100" b="1" dirty="0">
+                <a:solidFill>
+                  <a:srgbClr val="6B21A8"/>
+                </a:solidFill>
+                <a:latin typeface="Calibri" pitchFamily="34" charset="0"/>
+                <a:ea typeface="Calibri" pitchFamily="34" charset="-122"/>
+                <a:cs typeface="Calibri" pitchFamily="34" charset="-120"/>
+              </a:rPr>
+              <a:t>UNDERSTAND LATER</a:t>
+            </a:r>
+            <a:endParaRPr lang="en-US" sz="1100" dirty="0"/>
+          </a:p>
+        </p:txBody>
+      </p:sp>
+      <p:sp>
+        <p:nvSpPr>
+          <p:cNvPr id="21" name="Shape 17"/>
+          <p:cNvSpPr/>
+          <p:nvPr/>
+        </p:nvSpPr>
+        <p:spPr>
+          <a:xfrm>
+            <a:off x="8407349" y="91440"/>
+            <a:ext cx="1173226" cy="274320"/>
+          </a:xfrm>
+          <a:prstGeom prst="rect">
+            <a:avLst/>
+          </a:prstGeom>
+          <a:solidFill>
+            <a:srgbClr val="FEF3C7"/>
+          </a:solidFill>
+          <a:ln w="12700">
+            <a:solidFill>
+              <a:srgbClr val="B45309"/>
+            </a:solidFill>
+            <a:prstDash val="solid"/>
+          </a:ln>
+        </p:spPr>
+      </p:sp>
+      <p:sp>
+        <p:nvSpPr>
+          <p:cNvPr id="22" name="Shape 18"/>
+          <p:cNvSpPr/>
+          <p:nvPr/>
+        </p:nvSpPr>
+        <p:spPr>
+          <a:xfrm>
+            <a:off x="8407349" y="91440"/>
+            <a:ext cx="27432" cy="274320"/>
+          </a:xfrm>
+          <a:prstGeom prst="rect">
+            <a:avLst/>
+          </a:prstGeom>
+          <a:solidFill>
+            <a:srgbClr val="B45309"/>
+          </a:solidFill>
+          <a:ln w="12700">
+            <a:solidFill>
+              <a:srgbClr val="B45309"/>
+            </a:solidFill>
+            <a:prstDash val="solid"/>
+          </a:ln>
+        </p:spPr>
+      </p:sp>
+      <p:sp>
+        <p:nvSpPr>
+          <p:cNvPr id="23" name="Shape 19"/>
+          <p:cNvSpPr/>
+          <p:nvPr/>
+        </p:nvSpPr>
+        <p:spPr>
+          <a:xfrm>
+            <a:off x="8462213" y="91440"/>
+            <a:ext cx="27432" cy="274320"/>
+          </a:xfrm>
+          <a:prstGeom prst="rect">
+            <a:avLst/>
+          </a:prstGeom>
+          <a:solidFill>
+            <a:srgbClr val="B45309"/>
+          </a:solidFill>
+          <a:ln w="12700">
+            <a:solidFill>
+              <a:srgbClr val="B45309"/>
+            </a:solidFill>
+            <a:prstDash val="solid"/>
+          </a:ln>
+        </p:spPr>
+      </p:sp>
+      <p:pic>
+        <p:nvPicPr>
+          <p:cNvPr id="24" name="Image 2" descr="preencoded.png">    </p:cNvPr>
+          <p:cNvPicPr>
+            <a:picLocks noChangeAspect="1"/>
+          </p:cNvPicPr>
+          <p:nvPr/>
+        </p:nvPicPr>
+        <p:blipFill>
+          <a:blip r:embed="rId3"/>
+          <a:stretch>
+            <a:fillRect/>
+          </a:stretch>
+        </p:blipFill>
+        <p:spPr>
+          <a:xfrm>
+            <a:off x="8535365" y="128016"/>
+            <a:ext cx="201168" cy="201168"/>
+          </a:xfrm>
+          <a:prstGeom prst="rect">
+            <a:avLst/>
+          </a:prstGeom>
+        </p:spPr>
+      </p:pic>
+      <p:sp>
+        <p:nvSpPr>
+          <p:cNvPr id="25" name="Text 20"/>
+          <p:cNvSpPr txBox="1"/>
+          <p:nvPr/>
+        </p:nvSpPr>
+        <p:spPr>
+          <a:xfrm>
+            <a:off x="8791397" y="91440"/>
+            <a:ext cx="752602" cy="274320"/>
+          </a:xfrm>
+          <a:prstGeom prst="rect">
+            <a:avLst/>
+          </a:prstGeom>
+          <a:noFill/>
+          <a:ln/>
+        </p:spPr>
+        <p:txBody>
+          <a:bodyPr wrap="square" lIns="0" tIns="0" rIns="0" bIns="0" rtlCol="0" anchor="ctr"/>
+          <a:lstStyle/>
+          <a:p>
+            <a:pPr indent="0" marL="0">
+              <a:buNone/>
+            </a:pPr>
+            <a:r>
+              <a:rPr lang="en-US" sz="1100" b="1" dirty="0">
+                <a:solidFill>
+                  <a:srgbClr val="92400E"/>
+                </a:solidFill>
+                <a:latin typeface="Calibri" pitchFamily="34" charset="0"/>
+                <a:ea typeface="Calibri" pitchFamily="34" charset="-122"/>
+                <a:cs typeface="Calibri" pitchFamily="34" charset="-120"/>
+              </a:rPr>
+              <a:t>USE NOW</a:t>
+            </a:r>
+            <a:endParaRPr lang="en-US" sz="1100" dirty="0"/>
+          </a:p>
+        </p:txBody>
+      </p:sp>
+      <p:sp>
+        <p:nvSpPr>
+          <p:cNvPr id="26" name="Shape 21"/>
+          <p:cNvSpPr/>
+          <p:nvPr/>
+        </p:nvSpPr>
+        <p:spPr>
+          <a:xfrm>
+            <a:off x="6518097" y="91440"/>
+            <a:ext cx="1779524" cy="274320"/>
+          </a:xfrm>
+          <a:prstGeom prst="rect">
+            <a:avLst/>
+          </a:prstGeom>
+          <a:solidFill>
+            <a:srgbClr val="E0F2FE"/>
+          </a:solidFill>
+          <a:ln w="12700">
+            <a:solidFill>
+              <a:srgbClr val="0369A1"/>
+            </a:solidFill>
+            <a:prstDash val="solid"/>
+          </a:ln>
+        </p:spPr>
+      </p:sp>
+      <p:sp>
+        <p:nvSpPr>
+          <p:cNvPr id="27" name="Shape 22"/>
+          <p:cNvSpPr/>
+          <p:nvPr/>
+        </p:nvSpPr>
+        <p:spPr>
+          <a:xfrm>
+            <a:off x="6518097" y="91440"/>
+            <a:ext cx="73152" cy="274320"/>
+          </a:xfrm>
+          <a:prstGeom prst="rect">
+            <a:avLst/>
+          </a:prstGeom>
+          <a:solidFill>
+            <a:srgbClr val="0369A1"/>
+          </a:solidFill>
+          <a:ln w="12700">
+            <a:solidFill>
+              <a:srgbClr val="0369A1"/>
+            </a:solidFill>
+            <a:prstDash val="solid"/>
+          </a:ln>
+        </p:spPr>
+      </p:sp>
+      <p:pic>
+        <p:nvPicPr>
+          <p:cNvPr id="28" name="Image 3" descr="preencoded.png">    </p:cNvPr>
+          <p:cNvPicPr>
+            <a:picLocks noChangeAspect="1"/>
+          </p:cNvPicPr>
+          <p:nvPr/>
+        </p:nvPicPr>
+        <p:blipFill>
+          <a:blip r:embed="rId4"/>
+          <a:stretch>
+            <a:fillRect/>
+          </a:stretch>
+        </p:blipFill>
+        <p:spPr>
+          <a:xfrm>
+            <a:off x="6646113" y="128016"/>
+            <a:ext cx="201168" cy="201168"/>
+          </a:xfrm>
+          <a:prstGeom prst="rect">
+            <a:avLst/>
+          </a:prstGeom>
+        </p:spPr>
+      </p:pic>
+      <p:sp>
+        <p:nvSpPr>
+          <p:cNvPr id="29" name="Text 23"/>
+          <p:cNvSpPr txBox="1"/>
+          <p:nvPr/>
+        </p:nvSpPr>
+        <p:spPr>
+          <a:xfrm>
+            <a:off x="6902145" y="91440"/>
+            <a:ext cx="1358900" cy="274320"/>
+          </a:xfrm>
+          <a:prstGeom prst="rect">
+            <a:avLst/>
+          </a:prstGeom>
+          <a:noFill/>
+          <a:ln/>
+        </p:spPr>
+        <p:txBody>
+          <a:bodyPr wrap="square" lIns="0" tIns="0" rIns="0" bIns="0" rtlCol="0" anchor="ctr"/>
+          <a:lstStyle/>
+          <a:p>
+            <a:pPr indent="0" marL="0">
+              <a:buNone/>
+            </a:pPr>
+            <a:r>
+              <a:rPr lang="en-US" sz="1100" b="1" dirty="0">
+                <a:solidFill>
+                  <a:srgbClr val="075985"/>
+                </a:solidFill>
+                <a:latin typeface="Calibri" pitchFamily="34" charset="0"/>
+                <a:ea typeface="Calibri" pitchFamily="34" charset="-122"/>
+                <a:cs typeface="Calibri" pitchFamily="34" charset="-120"/>
+              </a:rPr>
+              <a:t>UNDERSTAND NOW</a:t>
+            </a:r>
+            <a:endParaRPr lang="en-US" sz="1100" dirty="0"/>
+          </a:p>
+        </p:txBody>
+      </p:sp>
+      <p:sp>
+        <p:nvSpPr>
           <p:cNvPr id="25" name="Slide Number Placeholder 0"/>
           <p:cNvSpPr>
             <a:spLocks noGrp="1"/>
@@ -3540,9 +3971,59 @@
           </a:ln>
         </p:spPr>
       </p:sp>
+      <p:sp>
+        <p:nvSpPr>
+          <p:cNvPr id="4" name="Shape 2"/>
+          <p:cNvSpPr/>
+          <p:nvPr/>
+        </p:nvSpPr>
+        <p:spPr>
+          <a:xfrm>
+            <a:off x="8484692" y="91440"/>
+            <a:ext cx="3158363" cy="274320"/>
+          </a:xfrm>
+          <a:prstGeom prst="rect">
+            <a:avLst/>
+          </a:prstGeom>
+          <a:solidFill>
+            <a:srgbClr val="E0F2FE"/>
+          </a:solidFill>
+          <a:ln w="12700">
+            <a:solidFill>
+              <a:srgbClr val="0369A1"/>
+            </a:solidFill>
+            <a:prstDash val="solid"/>
+          </a:ln>
+        </p:spPr>
+      </p:sp>
+      <p:sp>
+        <p:nvSpPr>
+          <p:cNvPr id="5" name="Shape 3"/>
+          <p:cNvSpPr/>
+          <p:nvPr/>
+        </p:nvSpPr>
+        <p:spPr>
+          <a:xfrm>
+            <a:off x="8484692" y="91440"/>
+            <a:ext cx="73152" cy="274320"/>
+          </a:xfrm>
+          <a:prstGeom prst="rect">
+            <a:avLst/>
+          </a:prstGeom>
+          <a:solidFill>
+            <a:srgbClr val="0369A1"/>
+          </a:solidFill>
+          <a:ln w="12700">
+            <a:solidFill>
+              <a:srgbClr val="0369A1"/>
+            </a:solidFill>
+            <a:prstDash val="solid"/>
+          </a:ln>
+        </p:spPr>
+      </p:sp>
       <p:pic>
         <p:nvPicPr>
-          <p:cNvPr id="5" name="Image 0" descr="preencoded.png">    </p:cNvPr>
+          <p:cNvPr id="6" name="Image 0" descr="preencoded.png">    </p:cNvPr>
           <p:cNvPicPr>
             <a:picLocks noChangeAspect="1"/>
           </p:cNvPicPr>
@@ -3556,6 +4037,83 @@
         </p:blipFill>
         <p:spPr>
           <a:xfrm>
+            <a:off x="8612708" y="128016"/>
+            <a:ext cx="201168" cy="201168"/>
+          </a:xfrm>
+          <a:prstGeom prst="rect">
+            <a:avLst/>
+          </a:prstGeom>
+        </p:spPr>
+      </p:pic>
+      <p:sp>
+        <p:nvSpPr>
+          <p:cNvPr id="7" name="Text 4"/>
+          <p:cNvSpPr txBox="1"/>
+          <p:nvPr/>
+        </p:nvSpPr>
+        <p:spPr>
+          <a:xfrm>
+            <a:off x="8868740" y="91440"/>
+            <a:ext cx="2737739" cy="274320"/>
+          </a:xfrm>
+          <a:prstGeom prst="rect">
+            <a:avLst/>
+          </a:prstGeom>
+          <a:noFill/>
+          <a:ln/>
+        </p:spPr>
+        <p:txBody>
+          <a:bodyPr wrap="square" lIns="0" tIns="0" rIns="0" bIns="0" rtlCol="0" anchor="ctr"/>
+          <a:lstStyle/>
+          <a:p>
+            <a:pPr indent="0" marL="0">
+              <a:buNone/>
+            </a:pPr>
+            <a:r>
+              <a:rPr lang="en-US" sz="1100" b="1" dirty="0">
+                <a:solidFill>
+                  <a:srgbClr val="075985"/>
+                </a:solidFill>
+                <a:latin typeface="Calibri" pitchFamily="34" charset="0"/>
+                <a:ea typeface="Calibri" pitchFamily="34" charset="-122"/>
+                <a:cs typeface="Calibri" pitchFamily="34" charset="-120"/>
+              </a:rPr>
+              <a:t>UNDERSTAND NOW</a:t>
+            </a:r>
+            <a:pPr indent="0" marL="0">
+              <a:buNone/>
+            </a:pPr>
+            <a:r>
+              <a:rPr lang="en-US" sz="1100" dirty="0">
+                <a:solidFill>
+                  <a:srgbClr val="075985"/>
+                </a:solidFill>
+                <a:latin typeface="Calibri" pitchFamily="34" charset="0"/>
+                <a:ea typeface="Calibri" pitchFamily="34" charset="-122"/>
+                <a:cs typeface="Calibri" pitchFamily="34" charset="-120"/>
+              </a:rPr>
+              <a:t> · from volts to bits</a:t>
+            </a:r>
+            <a:endParaRPr lang="en-US" sz="1100" dirty="0"/>
+          </a:p>
+        </p:txBody>
+      </p:sp>
+      <p:pic>
+        <p:nvPicPr>
+          <p:cNvPr id="9" name="Image 1" descr="preencoded.png">    </p:cNvPr>
+          <p:cNvPicPr>
+            <a:picLocks noChangeAspect="1"/>
+          </p:cNvPicPr>
+          <p:nvPr/>
+        </p:nvPicPr>
+        <p:blipFill>
+          <a:blip r:embed="rId2"/>
+          <a:stretch>
+            <a:fillRect/>
+          </a:stretch>
+        </p:blipFill>
+        <p:spPr>
+          <a:xfrm>
             <a:off x="685800" y="2159889"/>
             <a:ext cx="5486400" cy="3269742"/>
           </a:xfrm>
@@ -3566,7 +4124,7 @@
       </p:pic>
       <p:sp>
         <p:nvSpPr>
-          <p:cNvPr id="6" name="Shape 2"/>
+          <p:cNvPr id="10" name="Shape 5"/>
           <p:cNvSpPr/>
           <p:nvPr/>
         </p:nvSpPr>
@@ -3591,7 +4149,7 @@
       </p:sp>
       <p:sp>
         <p:nvSpPr>
-          <p:cNvPr id="7" name="Text 3"/>
+          <p:cNvPr id="11" name="Text 6"/>
           <p:cNvSpPr txBox="1"/>
           <p:nvPr/>
         </p:nvSpPr>
@@ -3633,7 +4191,7 @@
       </p:sp>
       <p:sp>
         <p:nvSpPr>
-          <p:cNvPr id="8" name="Shape 4"/>
+          <p:cNvPr id="12" name="Shape 7"/>
           <p:cNvSpPr/>
           <p:nvPr/>
         </p:nvSpPr>
@@ -3658,7 +4216,7 @@
       </p:sp>
       <p:sp>
         <p:nvSpPr>
-          <p:cNvPr id="9" name="Text 5"/>
+          <p:cNvPr id="13" name="Text 8"/>
           <p:cNvSpPr txBox="1"/>
           <p:nvPr/>
         </p:nvSpPr>
@@ -3720,7 +4278,7 @@
       </p:sp>
       <p:sp>
         <p:nvSpPr>
-          <p:cNvPr id="10" name="Shape 6"/>
+          <p:cNvPr id="14" name="Shape 9"/>
           <p:cNvSpPr/>
           <p:nvPr/>
         </p:nvSpPr>
@@ -3745,7 +4303,7 @@
       </p:sp>
       <p:sp>
         <p:nvSpPr>
-          <p:cNvPr id="11" name="Text 7"/>
+          <p:cNvPr id="15" name="Text 10"/>
           <p:cNvSpPr txBox="1"/>
           <p:nvPr/>
         </p:nvSpPr>
@@ -3807,7 +4365,7 @@
       </p:sp>
       <p:sp>
         <p:nvSpPr>
-          <p:cNvPr id="12" name="Shape 8"/>
+          <p:cNvPr id="16" name="Shape 11"/>
           <p:cNvSpPr/>
           <p:nvPr/>
         </p:nvSpPr>
@@ -3832,7 +4390,7 @@
       </p:sp>
       <p:sp>
         <p:nvSpPr>
-          <p:cNvPr id="13" name="Text 9"/>
+          <p:cNvPr id="17" name="Text 12"/>
           <p:cNvSpPr txBox="1"/>
           <p:nvPr/>
         </p:nvSpPr>
@@ -3874,7 +4432,7 @@
       </p:sp>
       <p:sp>
         <p:nvSpPr>
-          <p:cNvPr id="14" name="Shape 10"/>
+          <p:cNvPr id="18" name="Shape 13"/>
           <p:cNvSpPr/>
           <p:nvPr/>
         </p:nvSpPr>
@@ -3899,7 +4457,7 @@
       </p:sp>
       <p:sp>
         <p:nvSpPr>
-          <p:cNvPr id="15" name="Text 11"/>
+          <p:cNvPr id="19" name="Text 14"/>
           <p:cNvSpPr txBox="1"/>
           <p:nvPr/>
         </p:nvSpPr>
@@ -4415,6 +4973,133 @@
       </p:sp>
       <p:sp>
         <p:nvSpPr>
+          <p:cNvPr id="9" name="Shape 7"/>
+          <p:cNvSpPr/>
+          <p:nvPr/>
+        </p:nvSpPr>
+        <p:spPr>
+          <a:xfrm>
+            <a:off x="8484692" y="91440"/>
+            <a:ext cx="3158363" cy="274320"/>
+          </a:xfrm>
+          <a:prstGeom prst="rect">
+            <a:avLst/>
+          </a:prstGeom>
+          <a:solidFill>
+            <a:srgbClr val="E0F2FE"/>
+          </a:solidFill>
+          <a:ln w="12700">
+            <a:solidFill>
+              <a:srgbClr val="0369A1"/>
+            </a:solidFill>
+            <a:prstDash val="solid"/>
+          </a:ln>
+        </p:spPr>
+      </p:sp>
+      <p:sp>
+        <p:nvSpPr>
+          <p:cNvPr id="10" name="Shape 8"/>
+          <p:cNvSpPr/>
+          <p:nvPr/>
+        </p:nvSpPr>
+        <p:spPr>
+          <a:xfrm>
+            <a:off x="8484692" y="91440"/>
+            <a:ext cx="73152" cy="274320"/>
+          </a:xfrm>
+          <a:prstGeom prst="rect">
+            <a:avLst/>
+          </a:prstGeom>
+          <a:solidFill>
+            <a:srgbClr val="0369A1"/>
+          </a:solidFill>
+          <a:ln w="12700">
+            <a:solidFill>
+              <a:srgbClr val="0369A1"/>
+            </a:solidFill>
+            <a:prstDash val="solid"/>
+          </a:ln>
+        </p:spPr>
+      </p:sp>
+      <p:pic>
+        <p:nvPicPr>
+          <p:cNvPr id="11" name="Image 0" descr="preencoded.png">    </p:cNvPr>
+          <p:cNvPicPr>
+            <a:picLocks noChangeAspect="1"/>
+          </p:cNvPicPr>
+          <p:nvPr/>
+        </p:nvPicPr>
+        <p:blipFill>
+          <a:blip r:embed="rId1"/>
+          <a:stretch>
+            <a:fillRect/>
+          </a:stretch>
+        </p:blipFill>
+        <p:spPr>
+          <a:xfrm>
+            <a:off x="8612708" y="128016"/>
+            <a:ext cx="201168" cy="201168"/>
+          </a:xfrm>
+          <a:prstGeom prst="rect">
+            <a:avLst/>
+          </a:prstGeom>
+        </p:spPr>
+      </p:pic>
+      <p:sp>
+        <p:nvSpPr>
+          <p:cNvPr id="12" name="Text 9"/>
+          <p:cNvSpPr txBox="1"/>
+          <p:nvPr/>
+        </p:nvSpPr>
+        <p:spPr>
+          <a:xfrm>
+            <a:off x="8868740" y="91440"/>
+            <a:ext cx="2737739" cy="274320"/>
+          </a:xfrm>
+          <a:prstGeom prst="rect">
+            <a:avLst/>
+          </a:prstGeom>
+          <a:noFill/>
+          <a:ln/>
+        </p:spPr>
+        <p:txBody>
+          <a:bodyPr wrap="square" lIns="0" tIns="0" rIns="0" bIns="0" rtlCol="0" anchor="ctr"/>
+          <a:lstStyle/>
+          <a:p>
+            <a:pPr indent="0" marL="0">
+              <a:buNone/>
+            </a:pPr>
+            <a:r>
+              <a:rPr lang="en-US" sz="1100" b="1" dirty="0">
+                <a:solidFill>
+                  <a:srgbClr val="075985"/>
+                </a:solidFill>
+                <a:latin typeface="Calibri" pitchFamily="34" charset="0"/>
+                <a:ea typeface="Calibri" pitchFamily="34" charset="-122"/>
+                <a:cs typeface="Calibri" pitchFamily="34" charset="-120"/>
+              </a:rPr>
+              <a:t>UNDERSTAND NOW</a:t>
+            </a:r>
+            <a:pPr indent="0" marL="0">
+              <a:buNone/>
+            </a:pPr>
+            <a:r>
+              <a:rPr lang="en-US" sz="1100" dirty="0">
+                <a:solidFill>
+                  <a:srgbClr val="075985"/>
+                </a:solidFill>
+                <a:latin typeface="Calibri" pitchFamily="34" charset="0"/>
+                <a:ea typeface="Calibri" pitchFamily="34" charset="-122"/>
+                <a:cs typeface="Calibri" pitchFamily="34" charset="-120"/>
+              </a:rPr>
+              <a:t> · from volts to bits</a:t>
+            </a:r>
+            <a:endParaRPr lang="en-US" sz="1100" dirty="0"/>
+          </a:p>
+        </p:txBody>
+      </p:sp>
+      <p:sp>
+        <p:nvSpPr>
           <p:cNvPr id="25" name="Slide Number Placeholder 0"/>
           <p:cNvSpPr>
             <a:spLocks noGrp="1"/>
@@ -4554,9 +5239,59 @@
           </a:ln>
         </p:spPr>
       </p:sp>
+      <p:sp>
+        <p:nvSpPr>
+          <p:cNvPr id="4" name="Shape 2"/>
+          <p:cNvSpPr/>
+          <p:nvPr/>
+        </p:nvSpPr>
+        <p:spPr>
+          <a:xfrm>
+            <a:off x="9009964" y="91440"/>
+            <a:ext cx="2633091" cy="274320"/>
+          </a:xfrm>
+          <a:prstGeom prst="rect">
+            <a:avLst/>
+          </a:prstGeom>
+          <a:solidFill>
+            <a:srgbClr val="E0F2FE"/>
+          </a:solidFill>
+          <a:ln w="12700">
+            <a:solidFill>
+              <a:srgbClr val="0369A1"/>
+            </a:solidFill>
+            <a:prstDash val="solid"/>
+          </a:ln>
+        </p:spPr>
+      </p:sp>
+      <p:sp>
+        <p:nvSpPr>
+          <p:cNvPr id="5" name="Shape 3"/>
+          <p:cNvSpPr/>
+          <p:nvPr/>
+        </p:nvSpPr>
+        <p:spPr>
+          <a:xfrm>
+            <a:off x="9009964" y="91440"/>
+            <a:ext cx="73152" cy="274320"/>
+          </a:xfrm>
+          <a:prstGeom prst="rect">
+            <a:avLst/>
+          </a:prstGeom>
+          <a:solidFill>
+            <a:srgbClr val="0369A1"/>
+          </a:solidFill>
+          <a:ln w="12700">
+            <a:solidFill>
+              <a:srgbClr val="0369A1"/>
+            </a:solidFill>
+            <a:prstDash val="solid"/>
+          </a:ln>
+        </p:spPr>
+      </p:sp>
       <p:pic>
         <p:nvPicPr>
-          <p:cNvPr id="5" name="Image 0" descr="preencoded.png">    </p:cNvPr>
+          <p:cNvPr id="6" name="Image 0" descr="preencoded.png">    </p:cNvPr>
           <p:cNvPicPr>
             <a:picLocks noChangeAspect="1"/>
           </p:cNvPicPr>
@@ -4564,6 +5299,83 @@
         </p:nvPicPr>
         <p:blipFill>
           <a:blip r:embed="rId1"/>
+          <a:stretch>
+            <a:fillRect/>
+          </a:stretch>
+        </p:blipFill>
+        <p:spPr>
+          <a:xfrm>
+            <a:off x="9137980" y="128016"/>
+            <a:ext cx="201168" cy="201168"/>
+          </a:xfrm>
+          <a:prstGeom prst="rect">
+            <a:avLst/>
+          </a:prstGeom>
+        </p:spPr>
+      </p:pic>
+      <p:sp>
+        <p:nvSpPr>
+          <p:cNvPr id="7" name="Text 4"/>
+          <p:cNvSpPr txBox="1"/>
+          <p:nvPr/>
+        </p:nvSpPr>
+        <p:spPr>
+          <a:xfrm>
+            <a:off x="9394012" y="91440"/>
+            <a:ext cx="2212467" cy="274320"/>
+          </a:xfrm>
+          <a:prstGeom prst="rect">
+            <a:avLst/>
+          </a:prstGeom>
+          <a:noFill/>
+          <a:ln/>
+        </p:spPr>
+        <p:txBody>
+          <a:bodyPr wrap="square" lIns="0" tIns="0" rIns="0" bIns="0" rtlCol="0" anchor="ctr"/>
+          <a:lstStyle/>
+          <a:p>
+            <a:pPr indent="0" marL="0">
+              <a:buNone/>
+            </a:pPr>
+            <a:r>
+              <a:rPr lang="en-US" sz="1100" b="1" dirty="0">
+                <a:solidFill>
+                  <a:srgbClr val="075985"/>
+                </a:solidFill>
+                <a:latin typeface="Calibri" pitchFamily="34" charset="0"/>
+                <a:ea typeface="Calibri" pitchFamily="34" charset="-122"/>
+                <a:cs typeface="Calibri" pitchFamily="34" charset="-120"/>
+              </a:rPr>
+              <a:t>UNDERSTAND NOW</a:t>
+            </a:r>
+            <a:pPr indent="0" marL="0">
+              <a:buNone/>
+            </a:pPr>
+            <a:r>
+              <a:rPr lang="en-US" sz="1100" dirty="0">
+                <a:solidFill>
+                  <a:srgbClr val="075985"/>
+                </a:solidFill>
+                <a:latin typeface="Calibri" pitchFamily="34" charset="0"/>
+                <a:ea typeface="Calibri" pitchFamily="34" charset="-122"/>
+                <a:cs typeface="Calibri" pitchFamily="34" charset="-120"/>
+              </a:rPr>
+              <a:t> · CMOS gates</a:t>
+            </a:r>
+            <a:endParaRPr lang="en-US" sz="1100" dirty="0"/>
+          </a:p>
+        </p:txBody>
+      </p:sp>
+      <p:pic>
+        <p:nvPicPr>
+          <p:cNvPr id="9" name="Image 1" descr="preencoded.png">    </p:cNvPr>
+          <p:cNvPicPr>
+            <a:picLocks noChangeAspect="1"/>
+          </p:cNvPicPr>
+          <p:nvPr/>
+        </p:nvPicPr>
+        <p:blipFill>
+          <a:blip r:embed="rId2"/>
           <a:stretch>
             <a:fillRect/>
           </a:stretch>
@@ -5434,7 +6246,7 @@
       </p:graphicFrame>
       <p:sp>
         <p:nvSpPr>
-          <p:cNvPr id="7" name="Shape 2"/>
+          <p:cNvPr id="11" name="Shape 5"/>
           <p:cNvSpPr/>
           <p:nvPr/>
         </p:nvSpPr>
@@ -5459,7 +6271,7 @@
       </p:sp>
       <p:sp>
         <p:nvSpPr>
-          <p:cNvPr id="8" name="Text 3"/>
+          <p:cNvPr id="12" name="Text 6"/>
           <p:cNvSpPr txBox="1"/>
           <p:nvPr/>
         </p:nvSpPr>
@@ -5501,7 +6313,7 @@
       </p:sp>
       <p:sp>
         <p:nvSpPr>
-          <p:cNvPr id="9" name="Shape 4"/>
+          <p:cNvPr id="13" name="Shape 7"/>
           <p:cNvSpPr/>
           <p:nvPr/>
         </p:nvSpPr>
@@ -5526,7 +6338,7 @@
       </p:sp>
       <p:sp>
         <p:nvSpPr>
-          <p:cNvPr id="10" name="Text 5"/>
+          <p:cNvPr id="14" name="Text 8"/>
           <p:cNvSpPr txBox="1"/>
           <p:nvPr/>
         </p:nvSpPr>
@@ -5568,7 +6380,7 @@
       </p:sp>
       <p:sp>
         <p:nvSpPr>
-          <p:cNvPr id="11" name="Shape 6"/>
+          <p:cNvPr id="15" name="Shape 9"/>
           <p:cNvSpPr/>
           <p:nvPr/>
         </p:nvSpPr>
@@ -5593,7 +6405,7 @@
       </p:sp>
       <p:sp>
         <p:nvSpPr>
-          <p:cNvPr id="12" name="Text 7"/>
+          <p:cNvPr id="16" name="Text 10"/>
           <p:cNvSpPr txBox="1"/>
           <p:nvPr/>
         </p:nvSpPr>
@@ -5635,7 +6447,7 @@
       </p:sp>
       <p:sp>
         <p:nvSpPr>
-          <p:cNvPr id="13" name="Shape 8"/>
+          <p:cNvPr id="17" name="Shape 11"/>
           <p:cNvSpPr/>
           <p:nvPr/>
         </p:nvSpPr>
@@ -5660,7 +6472,7 @@
       </p:sp>
       <p:sp>
         <p:nvSpPr>
-          <p:cNvPr id="14" name="Text 9"/>
+          <p:cNvPr id="18" name="Text 12"/>
           <p:cNvSpPr txBox="1"/>
           <p:nvPr/>
         </p:nvSpPr>
@@ -5946,9 +6758,59 @@
           </a:p>
         </p:txBody>
       </p:sp>
+      <p:sp>
+        <p:nvSpPr>
+          <p:cNvPr id="7" name="Shape 5"/>
+          <p:cNvSpPr/>
+          <p:nvPr/>
+        </p:nvSpPr>
+        <p:spPr>
+          <a:xfrm>
+            <a:off x="9009964" y="91440"/>
+            <a:ext cx="2633091" cy="274320"/>
+          </a:xfrm>
+          <a:prstGeom prst="rect">
+            <a:avLst/>
+          </a:prstGeom>
+          <a:solidFill>
+            <a:srgbClr val="E0F2FE"/>
+          </a:solidFill>
+          <a:ln w="12700">
+            <a:solidFill>
+              <a:srgbClr val="0369A1"/>
+            </a:solidFill>
+            <a:prstDash val="solid"/>
+          </a:ln>
+        </p:spPr>
+      </p:sp>
+      <p:sp>
+        <p:nvSpPr>
+          <p:cNvPr id="8" name="Shape 6"/>
+          <p:cNvSpPr/>
+          <p:nvPr/>
+        </p:nvSpPr>
+        <p:spPr>
+          <a:xfrm>
+            <a:off x="9009964" y="91440"/>
+            <a:ext cx="73152" cy="274320"/>
+          </a:xfrm>
+          <a:prstGeom prst="rect">
+            <a:avLst/>
+          </a:prstGeom>
+          <a:solidFill>
+            <a:srgbClr val="0369A1"/>
+          </a:solidFill>
+          <a:ln w="12700">
+            <a:solidFill>
+              <a:srgbClr val="0369A1"/>
+            </a:solidFill>
+            <a:prstDash val="solid"/>
+          </a:ln>
+        </p:spPr>
+      </p:sp>
       <p:pic>
         <p:nvPicPr>
-          <p:cNvPr id="8" name="Image 0" descr="preencoded.png">    </p:cNvPr>
+          <p:cNvPr id="9" name="Image 0" descr="preencoded.png">    </p:cNvPr>
           <p:cNvPicPr>
             <a:picLocks noChangeAspect="1"/>
           </p:cNvPicPr>
@@ -5962,17 +6824,70 @@
         </p:blipFill>
         <p:spPr>
           <a:xfrm>
-            <a:off x="1447926" y="1874520"/>
-            <a:ext cx="3565756" cy="3383280"/>
+            <a:off x="9137980" y="128016"/>
+            <a:ext cx="201168" cy="201168"/>
           </a:xfrm>
           <a:prstGeom prst="rect">
             <a:avLst/>
           </a:prstGeom>
         </p:spPr>
       </p:pic>
+      <p:sp>
+        <p:nvSpPr>
+          <p:cNvPr id="10" name="Text 7"/>
+          <p:cNvSpPr txBox="1"/>
+          <p:nvPr/>
+        </p:nvSpPr>
+        <p:spPr>
+          <a:xfrm>
+            <a:off x="9394012" y="91440"/>
+            <a:ext cx="2212467" cy="274320"/>
+          </a:xfrm>
+          <a:prstGeom prst="rect">
+            <a:avLst/>
+          </a:prstGeom>
+          <a:noFill/>
+          <a:ln/>
+        </p:spPr>
+        <p:txBody>
+          <a:bodyPr wrap="square" lIns="0" tIns="0" rIns="0" bIns="0" rtlCol="0" anchor="ctr"/>
+          <a:lstStyle/>
+          <a:p>
+            <a:pPr indent="0" marL="0">
+              <a:buNone/>
+            </a:pPr>
+            <a:r>
+              <a:rPr lang="en-US" sz="1100" b="1" dirty="0">
+                <a:solidFill>
+                  <a:srgbClr val="075985"/>
+                </a:solidFill>
+                <a:latin typeface="Calibri" pitchFamily="34" charset="0"/>
+                <a:ea typeface="Calibri" pitchFamily="34" charset="-122"/>
+                <a:cs typeface="Calibri" pitchFamily="34" charset="-120"/>
+              </a:rPr>
+              <a:t>UNDERSTAND NOW</a:t>
+            </a:r>
+            <a:pPr indent="0" marL="0">
+              <a:buNone/>
+            </a:pPr>
+            <a:r>
+              <a:rPr lang="en-US" sz="1100" dirty="0">
+                <a:solidFill>
+                  <a:srgbClr val="075985"/>
+                </a:solidFill>
+                <a:latin typeface="Calibri" pitchFamily="34" charset="0"/>
+                <a:ea typeface="Calibri" pitchFamily="34" charset="-122"/>
+                <a:cs typeface="Calibri" pitchFamily="34" charset="-120"/>
+              </a:rPr>
+              <a:t> · CMOS gates</a:t>
+            </a:r>
+            <a:endParaRPr lang="en-US" sz="1100" dirty="0"/>
+          </a:p>
+        </p:txBody>
+      </p:sp>
       <p:pic>
         <p:nvPicPr>
-          <p:cNvPr id="9" name="Image 1" descr="preencoded.png">    </p:cNvPr>
+          <p:cNvPr id="12" name="Image 1" descr="preencoded.png">    </p:cNvPr>
           <p:cNvPicPr>
             <a:picLocks noChangeAspect="1"/>
           </p:cNvPicPr>
@@ -5986,6 +6901,30 @@
         </p:blipFill>
         <p:spPr>
           <a:xfrm>
+            <a:off x="1447926" y="1874520"/>
+            <a:ext cx="3565756" cy="3383280"/>
+          </a:xfrm>
+          <a:prstGeom prst="rect">
+            <a:avLst/>
+          </a:prstGeom>
+        </p:spPr>
+      </p:pic>
+      <p:pic>
+        <p:nvPicPr>
+          <p:cNvPr id="13" name="Image 2" descr="preencoded.png">    </p:cNvPr>
+          <p:cNvPicPr>
+            <a:picLocks noChangeAspect="1"/>
+          </p:cNvPicPr>
+          <p:nvPr/>
+        </p:nvPicPr>
+        <p:blipFill>
+          <a:blip r:embed="rId3"/>
+          <a:stretch>
+            <a:fillRect/>
+          </a:stretch>
+        </p:blipFill>
+        <p:spPr>
+          <a:xfrm>
             <a:off x="7178014" y="1874520"/>
             <a:ext cx="3565756" cy="3383280"/>
           </a:xfrm>
@@ -5996,7 +6935,7 @@
       </p:pic>
       <p:sp>
         <p:nvSpPr>
-          <p:cNvPr id="10" name="Shape 5"/>
+          <p:cNvPr id="14" name="Shape 8"/>
           <p:cNvSpPr/>
           <p:nvPr/>
         </p:nvSpPr>
@@ -6021,7 +6960,7 @@
       </p:sp>
       <p:sp>
         <p:nvSpPr>
-          <p:cNvPr id="11" name="Text 6"/>
+          <p:cNvPr id="15" name="Text 9"/>
           <p:cNvSpPr txBox="1"/>
           <p:nvPr/>
         </p:nvSpPr>
@@ -6063,7 +7002,7 @@
       </p:sp>
       <p:sp>
         <p:nvSpPr>
-          <p:cNvPr id="12" name="Shape 7"/>
+          <p:cNvPr id="16" name="Shape 10"/>
           <p:cNvSpPr/>
           <p:nvPr/>
         </p:nvSpPr>
@@ -6088,7 +7027,7 @@
       </p:sp>
       <p:sp>
         <p:nvSpPr>
-          <p:cNvPr id="13" name="Text 8"/>
+          <p:cNvPr id="17" name="Text 11"/>
           <p:cNvSpPr txBox="1"/>
           <p:nvPr/>
         </p:nvSpPr>
@@ -7962,6 +8901,133 @@
       </p:sp>
       <p:sp>
         <p:nvSpPr>
+          <p:cNvPr id="5" name="Shape 2"/>
+          <p:cNvSpPr/>
+          <p:nvPr/>
+        </p:nvSpPr>
+        <p:spPr>
+          <a:xfrm>
+            <a:off x="9009964" y="91440"/>
+            <a:ext cx="2633091" cy="274320"/>
+          </a:xfrm>
+          <a:prstGeom prst="rect">
+            <a:avLst/>
+          </a:prstGeom>
+          <a:solidFill>
+            <a:srgbClr val="E0F2FE"/>
+          </a:solidFill>
+          <a:ln w="12700">
+            <a:solidFill>
+              <a:srgbClr val="0369A1"/>
+            </a:solidFill>
+            <a:prstDash val="solid"/>
+          </a:ln>
+        </p:spPr>
+      </p:sp>
+      <p:sp>
+        <p:nvSpPr>
+          <p:cNvPr id="6" name="Shape 3"/>
+          <p:cNvSpPr/>
+          <p:nvPr/>
+        </p:nvSpPr>
+        <p:spPr>
+          <a:xfrm>
+            <a:off x="9009964" y="91440"/>
+            <a:ext cx="73152" cy="274320"/>
+          </a:xfrm>
+          <a:prstGeom prst="rect">
+            <a:avLst/>
+          </a:prstGeom>
+          <a:solidFill>
+            <a:srgbClr val="0369A1"/>
+          </a:solidFill>
+          <a:ln w="12700">
+            <a:solidFill>
+              <a:srgbClr val="0369A1"/>
+            </a:solidFill>
+            <a:prstDash val="solid"/>
+          </a:ln>
+        </p:spPr>
+      </p:sp>
+      <p:pic>
+        <p:nvPicPr>
+          <p:cNvPr id="7" name="Image 0" descr="preencoded.png">    </p:cNvPr>
+          <p:cNvPicPr>
+            <a:picLocks noChangeAspect="1"/>
+          </p:cNvPicPr>
+          <p:nvPr/>
+        </p:nvPicPr>
+        <p:blipFill>
+          <a:blip r:embed="rId1"/>
+          <a:stretch>
+            <a:fillRect/>
+          </a:stretch>
+        </p:blipFill>
+        <p:spPr>
+          <a:xfrm>
+            <a:off x="9137980" y="128016"/>
+            <a:ext cx="201168" cy="201168"/>
+          </a:xfrm>
+          <a:prstGeom prst="rect">
+            <a:avLst/>
+          </a:prstGeom>
+        </p:spPr>
+      </p:pic>
+      <p:sp>
+        <p:nvSpPr>
+          <p:cNvPr id="8" name="Text 4"/>
+          <p:cNvSpPr txBox="1"/>
+          <p:nvPr/>
+        </p:nvSpPr>
+        <p:spPr>
+          <a:xfrm>
+            <a:off x="9394012" y="91440"/>
+            <a:ext cx="2212467" cy="274320"/>
+          </a:xfrm>
+          <a:prstGeom prst="rect">
+            <a:avLst/>
+          </a:prstGeom>
+          <a:noFill/>
+          <a:ln/>
+        </p:spPr>
+        <p:txBody>
+          <a:bodyPr wrap="square" lIns="0" tIns="0" rIns="0" bIns="0" rtlCol="0" anchor="ctr"/>
+          <a:lstStyle/>
+          <a:p>
+            <a:pPr indent="0" marL="0">
+              <a:buNone/>
+            </a:pPr>
+            <a:r>
+              <a:rPr lang="en-US" sz="1100" b="1" dirty="0">
+                <a:solidFill>
+                  <a:srgbClr val="075985"/>
+                </a:solidFill>
+                <a:latin typeface="Calibri" pitchFamily="34" charset="0"/>
+                <a:ea typeface="Calibri" pitchFamily="34" charset="-122"/>
+                <a:cs typeface="Calibri" pitchFamily="34" charset="-120"/>
+              </a:rPr>
+              <a:t>UNDERSTAND NOW</a:t>
+            </a:r>
+            <a:pPr indent="0" marL="0">
+              <a:buNone/>
+            </a:pPr>
+            <a:r>
+              <a:rPr lang="en-US" sz="1100" dirty="0">
+                <a:solidFill>
+                  <a:srgbClr val="075985"/>
+                </a:solidFill>
+                <a:latin typeface="Calibri" pitchFamily="34" charset="0"/>
+                <a:ea typeface="Calibri" pitchFamily="34" charset="-122"/>
+                <a:cs typeface="Calibri" pitchFamily="34" charset="-120"/>
+              </a:rPr>
+              <a:t> · CMOS gates</a:t>
+            </a:r>
+            <a:endParaRPr lang="en-US" sz="1100" dirty="0"/>
+          </a:p>
+        </p:txBody>
+      </p:sp>
+      <p:sp>
+        <p:nvSpPr>
           <p:cNvPr id="25" name="Slide Number Placeholder 0"/>
           <p:cNvSpPr>
             <a:spLocks noGrp="1"/>
@@ -8536,6 +9602,324 @@
       </p:sp>
       <p:sp>
         <p:nvSpPr>
+          <p:cNvPr id="16" name="Shape 14"/>
+          <p:cNvSpPr/>
+          <p:nvPr/>
+        </p:nvSpPr>
+        <p:spPr>
+          <a:xfrm>
+            <a:off x="7939862" y="91440"/>
+            <a:ext cx="3703193" cy="274320"/>
+          </a:xfrm>
+          <a:prstGeom prst="rect">
+            <a:avLst/>
+          </a:prstGeom>
+          <a:solidFill>
+            <a:srgbClr val="F3E8FF"/>
+          </a:solidFill>
+          <a:ln w="12700">
+            <a:solidFill>
+              <a:srgbClr val="7E22CE"/>
+            </a:solidFill>
+            <a:prstDash val="dash"/>
+          </a:ln>
+        </p:spPr>
+      </p:sp>
+      <p:sp>
+        <p:nvSpPr>
+          <p:cNvPr id="17" name="Shape 15"/>
+          <p:cNvSpPr/>
+          <p:nvPr/>
+        </p:nvSpPr>
+        <p:spPr>
+          <a:xfrm>
+            <a:off x="7967294" y="128016"/>
+            <a:ext cx="45720" cy="45720"/>
+          </a:xfrm>
+          <a:prstGeom prst="rect">
+            <a:avLst/>
+          </a:prstGeom>
+          <a:solidFill>
+            <a:srgbClr val="7E22CE"/>
+          </a:solidFill>
+          <a:ln w="12700">
+            <a:solidFill>
+              <a:srgbClr val="7E22CE"/>
+            </a:solidFill>
+            <a:prstDash val="solid"/>
+          </a:ln>
+        </p:spPr>
+      </p:sp>
+      <p:sp>
+        <p:nvSpPr>
+          <p:cNvPr id="18" name="Shape 16"/>
+          <p:cNvSpPr/>
+          <p:nvPr/>
+        </p:nvSpPr>
+        <p:spPr>
+          <a:xfrm>
+            <a:off x="7967294" y="205740"/>
+            <a:ext cx="45720" cy="45720"/>
+          </a:xfrm>
+          <a:prstGeom prst="rect">
+            <a:avLst/>
+          </a:prstGeom>
+          <a:solidFill>
+            <a:srgbClr val="7E22CE"/>
+          </a:solidFill>
+          <a:ln w="12700">
+            <a:solidFill>
+              <a:srgbClr val="7E22CE"/>
+            </a:solidFill>
+            <a:prstDash val="solid"/>
+          </a:ln>
+        </p:spPr>
+      </p:sp>
+      <p:sp>
+        <p:nvSpPr>
+          <p:cNvPr id="19" name="Shape 17"/>
+          <p:cNvSpPr/>
+          <p:nvPr/>
+        </p:nvSpPr>
+        <p:spPr>
+          <a:xfrm>
+            <a:off x="7967294" y="283464"/>
+            <a:ext cx="45720" cy="45720"/>
+          </a:xfrm>
+          <a:prstGeom prst="rect">
+            <a:avLst/>
+          </a:prstGeom>
+          <a:solidFill>
+            <a:srgbClr val="7E22CE"/>
+          </a:solidFill>
+          <a:ln w="12700">
+            <a:solidFill>
+              <a:srgbClr val="7E22CE"/>
+            </a:solidFill>
+            <a:prstDash val="solid"/>
+          </a:ln>
+        </p:spPr>
+      </p:sp>
+      <p:pic>
+        <p:nvPicPr>
+          <p:cNvPr id="20" name="Image 0" descr="preencoded.png">    </p:cNvPr>
+          <p:cNvPicPr>
+            <a:picLocks noChangeAspect="1"/>
+          </p:cNvPicPr>
+          <p:nvPr/>
+        </p:nvPicPr>
+        <p:blipFill>
+          <a:blip r:embed="rId1"/>
+          <a:stretch>
+            <a:fillRect/>
+          </a:stretch>
+        </p:blipFill>
+        <p:spPr>
+          <a:xfrm>
+            <a:off x="8067878" y="128016"/>
+            <a:ext cx="201168" cy="201168"/>
+          </a:xfrm>
+          <a:prstGeom prst="rect">
+            <a:avLst/>
+          </a:prstGeom>
+        </p:spPr>
+      </p:pic>
+      <p:sp>
+        <p:nvSpPr>
+          <p:cNvPr id="21" name="Text 18"/>
+          <p:cNvSpPr txBox="1"/>
+          <p:nvPr/>
+        </p:nvSpPr>
+        <p:spPr>
+          <a:xfrm>
+            <a:off x="8323910" y="91440"/>
+            <a:ext cx="3282569" cy="274320"/>
+          </a:xfrm>
+          <a:prstGeom prst="rect">
+            <a:avLst/>
+          </a:prstGeom>
+          <a:noFill/>
+          <a:ln/>
+        </p:spPr>
+        <p:txBody>
+          <a:bodyPr wrap="square" lIns="0" tIns="0" rIns="0" bIns="0" rtlCol="0" anchor="ctr"/>
+          <a:lstStyle/>
+          <a:p>
+            <a:pPr indent="0" marL="0">
+              <a:buNone/>
+            </a:pPr>
+            <a:r>
+              <a:rPr lang="en-US" sz="1100" b="1" dirty="0">
+                <a:solidFill>
+                  <a:srgbClr val="6B21A8"/>
+                </a:solidFill>
+                <a:latin typeface="Calibri" pitchFamily="34" charset="0"/>
+                <a:ea typeface="Calibri" pitchFamily="34" charset="-122"/>
+                <a:cs typeface="Calibri" pitchFamily="34" charset="-120"/>
+              </a:rPr>
+              <a:t>UNDERSTAND LATER</a:t>
+            </a:r>
+            <a:pPr indent="0" marL="0">
+              <a:buNone/>
+            </a:pPr>
+            <a:r>
+              <a:rPr lang="en-US" sz="1100" dirty="0">
+                <a:solidFill>
+                  <a:srgbClr val="6B21A8"/>
+                </a:solidFill>
+                <a:latin typeface="Calibri" pitchFamily="34" charset="0"/>
+                <a:ea typeface="Calibri" pitchFamily="34" charset="-122"/>
+                <a:cs typeface="Calibri" pitchFamily="34" charset="-120"/>
+              </a:rPr>
+              <a:t> · the clock</a:t>
+            </a:r>
+            <a:pPr indent="0" marL="0">
+              <a:buNone/>
+            </a:pPr>
+            <a:r>
+              <a:rPr lang="en-US" sz="1100" b="1" dirty="0">
+                <a:solidFill>
+                  <a:srgbClr val="6B21A8"/>
+                </a:solidFill>
+                <a:latin typeface="Calibri" pitchFamily="34" charset="0"/>
+                <a:ea typeface="Calibri" pitchFamily="34" charset="-122"/>
+                <a:cs typeface="Calibri" pitchFamily="34" charset="-120"/>
+              </a:rPr>
+              <a:t> → Lecture 13</a:t>
+            </a:r>
+            <a:endParaRPr lang="en-US" sz="1100" dirty="0"/>
+          </a:p>
+        </p:txBody>
+      </p:sp>
+      <p:sp>
+        <p:nvSpPr>
+          <p:cNvPr id="22" name="Shape 19"/>
+          <p:cNvSpPr/>
+          <p:nvPr/>
+        </p:nvSpPr>
+        <p:spPr>
+          <a:xfrm>
+            <a:off x="5197043" y="91440"/>
+            <a:ext cx="2633091" cy="274320"/>
+          </a:xfrm>
+          <a:prstGeom prst="rect">
+            <a:avLst/>
+          </a:prstGeom>
+          <a:solidFill>
+            <a:srgbClr val="E0F2FE"/>
+          </a:solidFill>
+          <a:ln w="12700">
+            <a:solidFill>
+              <a:srgbClr val="0369A1"/>
+            </a:solidFill>
+            <a:prstDash val="solid"/>
+          </a:ln>
+        </p:spPr>
+      </p:sp>
+      <p:sp>
+        <p:nvSpPr>
+          <p:cNvPr id="23" name="Shape 20"/>
+          <p:cNvSpPr/>
+          <p:nvPr/>
+        </p:nvSpPr>
+        <p:spPr>
+          <a:xfrm>
+            <a:off x="5197043" y="91440"/>
+            <a:ext cx="73152" cy="274320"/>
+          </a:xfrm>
+          <a:prstGeom prst="rect">
+            <a:avLst/>
+          </a:prstGeom>
+          <a:solidFill>
+            <a:srgbClr val="0369A1"/>
+          </a:solidFill>
+          <a:ln w="12700">
+            <a:solidFill>
+              <a:srgbClr val="0369A1"/>
+            </a:solidFill>
+            <a:prstDash val="solid"/>
+          </a:ln>
+        </p:spPr>
+      </p:sp>
+      <p:pic>
+        <p:nvPicPr>
+          <p:cNvPr id="24" name="Image 1" descr="preencoded.png">    </p:cNvPr>
+          <p:cNvPicPr>
+            <a:picLocks noChangeAspect="1"/>
+          </p:cNvPicPr>
+          <p:nvPr/>
+        </p:nvPicPr>
+        <p:blipFill>
+          <a:blip r:embed="rId2"/>
+          <a:stretch>
+            <a:fillRect/>
+          </a:stretch>
+        </p:blipFill>
+        <p:spPr>
+          <a:xfrm>
+            <a:off x="5325059" y="128016"/>
+            <a:ext cx="201168" cy="201168"/>
+          </a:xfrm>
+          <a:prstGeom prst="rect">
+            <a:avLst/>
+          </a:prstGeom>
+        </p:spPr>
+      </p:pic>
+      <p:sp>
+        <p:nvSpPr>
+          <p:cNvPr id="25" name="Text 21"/>
+          <p:cNvSpPr txBox="1"/>
+          <p:nvPr/>
+        </p:nvSpPr>
+        <p:spPr>
+          <a:xfrm>
+            <a:off x="5581091" y="91440"/>
+            <a:ext cx="2212467" cy="274320"/>
+          </a:xfrm>
+          <a:prstGeom prst="rect">
+            <a:avLst/>
+          </a:prstGeom>
+          <a:noFill/>
+          <a:ln/>
+        </p:spPr>
+        <p:txBody>
+          <a:bodyPr wrap="square" lIns="0" tIns="0" rIns="0" bIns="0" rtlCol="0" anchor="ctr"/>
+          <a:lstStyle/>
+          <a:p>
+            <a:pPr indent="0" marL="0">
+              <a:buNone/>
+            </a:pPr>
+            <a:r>
+              <a:rPr lang="en-US" sz="1100" b="1" dirty="0">
+                <a:solidFill>
+                  <a:srgbClr val="075985"/>
+                </a:solidFill>
+                <a:latin typeface="Calibri" pitchFamily="34" charset="0"/>
+                <a:ea typeface="Calibri" pitchFamily="34" charset="-122"/>
+                <a:cs typeface="Calibri" pitchFamily="34" charset="-120"/>
+              </a:rPr>
+              <a:t>UNDERSTAND NOW</a:t>
+            </a:r>
+            <a:pPr indent="0" marL="0">
+              <a:buNone/>
+            </a:pPr>
+            <a:r>
+              <a:rPr lang="en-US" sz="1100" dirty="0">
+                <a:solidFill>
+                  <a:srgbClr val="075985"/>
+                </a:solidFill>
+                <a:latin typeface="Calibri" pitchFamily="34" charset="0"/>
+                <a:ea typeface="Calibri" pitchFamily="34" charset="-122"/>
+                <a:cs typeface="Calibri" pitchFamily="34" charset="-120"/>
+              </a:rPr>
+              <a:t> · CMOS gates</a:t>
+            </a:r>
+            <a:endParaRPr lang="en-US" sz="1100" dirty="0"/>
+          </a:p>
+        </p:txBody>
+      </p:sp>
+      <p:sp>
+        <p:nvSpPr>
           <p:cNvPr id="25" name="Slide Number Placeholder 0"/>
           <p:cNvSpPr>
             <a:spLocks noGrp="1"/>
@@ -8702,9 +10086,59 @@
           </a:ln>
         </p:spPr>
       </p:sp>
+      <p:sp>
+        <p:nvSpPr>
+          <p:cNvPr id="5" name="Shape 3"/>
+          <p:cNvSpPr/>
+          <p:nvPr/>
+        </p:nvSpPr>
+        <p:spPr>
+          <a:xfrm>
+            <a:off x="8747328" y="91440"/>
+            <a:ext cx="2895727" cy="274320"/>
+          </a:xfrm>
+          <a:prstGeom prst="rect">
+            <a:avLst/>
+          </a:prstGeom>
+          <a:solidFill>
+            <a:srgbClr val="E0F2FE"/>
+          </a:solidFill>
+          <a:ln w="12700">
+            <a:solidFill>
+              <a:srgbClr val="0369A1"/>
+            </a:solidFill>
+            <a:prstDash val="solid"/>
+          </a:ln>
+        </p:spPr>
+      </p:sp>
+      <p:sp>
+        <p:nvSpPr>
+          <p:cNvPr id="6" name="Shape 4"/>
+          <p:cNvSpPr/>
+          <p:nvPr/>
+        </p:nvSpPr>
+        <p:spPr>
+          <a:xfrm>
+            <a:off x="8747328" y="91440"/>
+            <a:ext cx="73152" cy="274320"/>
+          </a:xfrm>
+          <a:prstGeom prst="rect">
+            <a:avLst/>
+          </a:prstGeom>
+          <a:solidFill>
+            <a:srgbClr val="0369A1"/>
+          </a:solidFill>
+          <a:ln w="12700">
+            <a:solidFill>
+              <a:srgbClr val="0369A1"/>
+            </a:solidFill>
+            <a:prstDash val="solid"/>
+          </a:ln>
+        </p:spPr>
+      </p:sp>
       <p:pic>
         <p:nvPicPr>
-          <p:cNvPr id="6" name="Image 0" descr="preencoded.png">    </p:cNvPr>
+          <p:cNvPr id="7" name="Image 0" descr="preencoded.png">    </p:cNvPr>
           <p:cNvPicPr>
             <a:picLocks noChangeAspect="1"/>
           </p:cNvPicPr>
@@ -8718,17 +10152,70 @@
         </p:blipFill>
         <p:spPr>
           <a:xfrm>
-            <a:off x="640080" y="2105753"/>
-            <a:ext cx="2560320" cy="3378014"/>
+            <a:off x="8875344" y="128016"/>
+            <a:ext cx="201168" cy="201168"/>
           </a:xfrm>
           <a:prstGeom prst="rect">
             <a:avLst/>
           </a:prstGeom>
         </p:spPr>
       </p:pic>
+      <p:sp>
+        <p:nvSpPr>
+          <p:cNvPr id="8" name="Text 5"/>
+          <p:cNvSpPr txBox="1"/>
+          <p:nvPr/>
+        </p:nvSpPr>
+        <p:spPr>
+          <a:xfrm>
+            <a:off x="9131376" y="91440"/>
+            <a:ext cx="2475103" cy="274320"/>
+          </a:xfrm>
+          <a:prstGeom prst="rect">
+            <a:avLst/>
+          </a:prstGeom>
+          <a:noFill/>
+          <a:ln/>
+        </p:spPr>
+        <p:txBody>
+          <a:bodyPr wrap="square" lIns="0" tIns="0" rIns="0" bIns="0" rtlCol="0" anchor="ctr"/>
+          <a:lstStyle/>
+          <a:p>
+            <a:pPr indent="0" marL="0">
+              <a:buNone/>
+            </a:pPr>
+            <a:r>
+              <a:rPr lang="en-US" sz="1100" b="1" dirty="0">
+                <a:solidFill>
+                  <a:srgbClr val="075985"/>
+                </a:solidFill>
+                <a:latin typeface="Calibri" pitchFamily="34" charset="0"/>
+                <a:ea typeface="Calibri" pitchFamily="34" charset="-122"/>
+                <a:cs typeface="Calibri" pitchFamily="34" charset="-120"/>
+              </a:rPr>
+              <a:t>UNDERSTAND NOW</a:t>
+            </a:r>
+            <a:pPr indent="0" marL="0">
+              <a:buNone/>
+            </a:pPr>
+            <a:r>
+              <a:rPr lang="en-US" sz="1100" dirty="0">
+                <a:solidFill>
+                  <a:srgbClr val="075985"/>
+                </a:solidFill>
+                <a:latin typeface="Calibri" pitchFamily="34" charset="0"/>
+                <a:ea typeface="Calibri" pitchFamily="34" charset="-122"/>
+                <a:cs typeface="Calibri" pitchFamily="34" charset="-120"/>
+              </a:rPr>
+              <a:t> · pull-up inputs</a:t>
+            </a:r>
+            <a:endParaRPr lang="en-US" sz="1100" dirty="0"/>
+          </a:p>
+        </p:txBody>
+      </p:sp>
       <p:pic>
         <p:nvPicPr>
-          <p:cNvPr id="7" name="Image 1" descr="preencoded.png">    </p:cNvPr>
+          <p:cNvPr id="10" name="Image 1" descr="preencoded.png">    </p:cNvPr>
           <p:cNvPicPr>
             <a:picLocks noChangeAspect="1"/>
           </p:cNvPicPr>
@@ -8742,6 +10229,30 @@
         </p:blipFill>
         <p:spPr>
           <a:xfrm>
+            <a:off x="640080" y="2105753"/>
+            <a:ext cx="2560320" cy="3378014"/>
+          </a:xfrm>
+          <a:prstGeom prst="rect">
+            <a:avLst/>
+          </a:prstGeom>
+        </p:spPr>
+      </p:pic>
+      <p:pic>
+        <p:nvPicPr>
+          <p:cNvPr id="11" name="Image 2" descr="preencoded.png">    </p:cNvPr>
+          <p:cNvPicPr>
+            <a:picLocks noChangeAspect="1"/>
+          </p:cNvPicPr>
+          <p:nvPr/>
+        </p:nvPicPr>
+        <p:blipFill>
+          <a:blip r:embed="rId3"/>
+          <a:stretch>
+            <a:fillRect/>
+          </a:stretch>
+        </p:blipFill>
+        <p:spPr>
+          <a:xfrm>
             <a:off x="3611880" y="2105753"/>
             <a:ext cx="2560320" cy="3378014"/>
           </a:xfrm>
@@ -8752,7 +10263,7 @@
       </p:pic>
       <p:sp>
         <p:nvSpPr>
-          <p:cNvPr id="8" name="Shape 3"/>
+          <p:cNvPr id="12" name="Shape 6"/>
           <p:cNvSpPr/>
           <p:nvPr/>
         </p:nvSpPr>
@@ -8777,7 +10288,7 @@
       </p:sp>
       <p:sp>
         <p:nvSpPr>
-          <p:cNvPr id="9" name="Text 4"/>
+          <p:cNvPr id="13" name="Text 7"/>
           <p:cNvSpPr txBox="1"/>
           <p:nvPr/>
         </p:nvSpPr>
@@ -8819,7 +10330,7 @@
       </p:sp>
       <p:sp>
         <p:nvSpPr>
-          <p:cNvPr id="10" name="Shape 5"/>
+          <p:cNvPr id="14" name="Shape 8"/>
           <p:cNvSpPr/>
           <p:nvPr/>
         </p:nvSpPr>
@@ -8844,7 +10355,7 @@
       </p:sp>
       <p:sp>
         <p:nvSpPr>
-          <p:cNvPr id="11" name="Text 6"/>
+          <p:cNvPr id="15" name="Text 9"/>
           <p:cNvSpPr txBox="1"/>
           <p:nvPr/>
         </p:nvSpPr>
@@ -8886,7 +10397,7 @@
       </p:sp>
       <p:sp>
         <p:nvSpPr>
-          <p:cNvPr id="12" name="Shape 7"/>
+          <p:cNvPr id="16" name="Shape 10"/>
           <p:cNvSpPr/>
           <p:nvPr/>
         </p:nvSpPr>
@@ -8911,7 +10422,7 @@
       </p:sp>
       <p:sp>
         <p:nvSpPr>
-          <p:cNvPr id="13" name="Text 8"/>
+          <p:cNvPr id="17" name="Text 11"/>
           <p:cNvSpPr txBox="1"/>
           <p:nvPr/>
         </p:nvSpPr>
@@ -8973,7 +10484,7 @@
       </p:sp>
       <p:sp>
         <p:nvSpPr>
-          <p:cNvPr id="14" name="Shape 9"/>
+          <p:cNvPr id="18" name="Shape 12"/>
           <p:cNvSpPr/>
           <p:nvPr/>
         </p:nvSpPr>
@@ -8998,7 +10509,7 @@
       </p:sp>
       <p:sp>
         <p:nvSpPr>
-          <p:cNvPr id="15" name="Text 10"/>
+          <p:cNvPr id="19" name="Text 13"/>
           <p:cNvSpPr txBox="1"/>
           <p:nvPr/>
         </p:nvSpPr>
@@ -9040,7 +10551,7 @@
       </p:sp>
       <p:sp>
         <p:nvSpPr>
-          <p:cNvPr id="16" name="Shape 11"/>
+          <p:cNvPr id="20" name="Shape 14"/>
           <p:cNvSpPr/>
           <p:nvPr/>
         </p:nvSpPr>
@@ -9065,7 +10576,7 @@
       </p:sp>
       <p:sp>
         <p:nvSpPr>
-          <p:cNvPr id="17" name="Text 12"/>
+          <p:cNvPr id="21" name="Text 15"/>
           <p:cNvSpPr txBox="1"/>
           <p:nvPr/>
         </p:nvSpPr>
@@ -16604,6 +18115,133 @@
       </p:sp>
       <p:sp>
         <p:nvSpPr>
+          <p:cNvPr id="5" name="Shape 2"/>
+          <p:cNvSpPr/>
+          <p:nvPr/>
+        </p:nvSpPr>
+        <p:spPr>
+          <a:xfrm>
+            <a:off x="7893761" y="91440"/>
+            <a:ext cx="3749294" cy="274320"/>
+          </a:xfrm>
+          <a:prstGeom prst="rect">
+            <a:avLst/>
+          </a:prstGeom>
+          <a:solidFill>
+            <a:srgbClr val="E0F2FE"/>
+          </a:solidFill>
+          <a:ln w="12700">
+            <a:solidFill>
+              <a:srgbClr val="0369A1"/>
+            </a:solidFill>
+            <a:prstDash val="solid"/>
+          </a:ln>
+        </p:spPr>
+      </p:sp>
+      <p:sp>
+        <p:nvSpPr>
+          <p:cNvPr id="6" name="Shape 3"/>
+          <p:cNvSpPr/>
+          <p:nvPr/>
+        </p:nvSpPr>
+        <p:spPr>
+          <a:xfrm>
+            <a:off x="7893761" y="91440"/>
+            <a:ext cx="73152" cy="274320"/>
+          </a:xfrm>
+          <a:prstGeom prst="rect">
+            <a:avLst/>
+          </a:prstGeom>
+          <a:solidFill>
+            <a:srgbClr val="0369A1"/>
+          </a:solidFill>
+          <a:ln w="12700">
+            <a:solidFill>
+              <a:srgbClr val="0369A1"/>
+            </a:solidFill>
+            <a:prstDash val="solid"/>
+          </a:ln>
+        </p:spPr>
+      </p:sp>
+      <p:pic>
+        <p:nvPicPr>
+          <p:cNvPr id="7" name="Image 0" descr="preencoded.png">    </p:cNvPr>
+          <p:cNvPicPr>
+            <a:picLocks noChangeAspect="1"/>
+          </p:cNvPicPr>
+          <p:nvPr/>
+        </p:nvPicPr>
+        <p:blipFill>
+          <a:blip r:embed="rId1"/>
+          <a:stretch>
+            <a:fillRect/>
+          </a:stretch>
+        </p:blipFill>
+        <p:spPr>
+          <a:xfrm>
+            <a:off x="8021777" y="128016"/>
+            <a:ext cx="201168" cy="201168"/>
+          </a:xfrm>
+          <a:prstGeom prst="rect">
+            <a:avLst/>
+          </a:prstGeom>
+        </p:spPr>
+      </p:pic>
+      <p:sp>
+        <p:nvSpPr>
+          <p:cNvPr id="8" name="Text 4"/>
+          <p:cNvSpPr txBox="1"/>
+          <p:nvPr/>
+        </p:nvSpPr>
+        <p:spPr>
+          <a:xfrm>
+            <a:off x="8277809" y="91440"/>
+            <a:ext cx="3328670" cy="274320"/>
+          </a:xfrm>
+          <a:prstGeom prst="rect">
+            <a:avLst/>
+          </a:prstGeom>
+          <a:noFill/>
+          <a:ln/>
+        </p:spPr>
+        <p:txBody>
+          <a:bodyPr wrap="square" lIns="0" tIns="0" rIns="0" bIns="0" rtlCol="0" anchor="ctr"/>
+          <a:lstStyle/>
+          <a:p>
+            <a:pPr indent="0" marL="0">
+              <a:buNone/>
+            </a:pPr>
+            <a:r>
+              <a:rPr lang="en-US" sz="1100" b="1" dirty="0">
+                <a:solidFill>
+                  <a:srgbClr val="075985"/>
+                </a:solidFill>
+                <a:latin typeface="Calibri" pitchFamily="34" charset="0"/>
+                <a:ea typeface="Calibri" pitchFamily="34" charset="-122"/>
+                <a:cs typeface="Calibri" pitchFamily="34" charset="-120"/>
+              </a:rPr>
+              <a:t>UNDERSTAND NOW</a:t>
+            </a:r>
+            <a:pPr indent="0" marL="0">
+              <a:buNone/>
+            </a:pPr>
+            <a:r>
+              <a:rPr lang="en-US" sz="1100" dirty="0">
+                <a:solidFill>
+                  <a:srgbClr val="075985"/>
+                </a:solidFill>
+                <a:latin typeface="Calibri" pitchFamily="34" charset="0"/>
+                <a:ea typeface="Calibri" pitchFamily="34" charset="-122"/>
+                <a:cs typeface="Calibri" pitchFamily="34" charset="-120"/>
+              </a:rPr>
+              <a:t> · voltage, current, Ohm's law</a:t>
+            </a:r>
+            <a:endParaRPr lang="en-US" sz="1100" dirty="0"/>
+          </a:p>
+        </p:txBody>
+      </p:sp>
+      <p:sp>
+        <p:nvSpPr>
           <p:cNvPr id="25" name="Slide Number Placeholder 0"/>
           <p:cNvSpPr>
             <a:spLocks noGrp="1"/>
@@ -16743,9 +18381,59 @@
           </a:ln>
         </p:spPr>
       </p:sp>
+      <p:sp>
+        <p:nvSpPr>
+          <p:cNvPr id="4" name="Shape 2"/>
+          <p:cNvSpPr/>
+          <p:nvPr/>
+        </p:nvSpPr>
+        <p:spPr>
+          <a:xfrm>
+            <a:off x="7893761" y="91440"/>
+            <a:ext cx="3749294" cy="274320"/>
+          </a:xfrm>
+          <a:prstGeom prst="rect">
+            <a:avLst/>
+          </a:prstGeom>
+          <a:solidFill>
+            <a:srgbClr val="E0F2FE"/>
+          </a:solidFill>
+          <a:ln w="12700">
+            <a:solidFill>
+              <a:srgbClr val="0369A1"/>
+            </a:solidFill>
+            <a:prstDash val="solid"/>
+          </a:ln>
+        </p:spPr>
+      </p:sp>
+      <p:sp>
+        <p:nvSpPr>
+          <p:cNvPr id="5" name="Shape 3"/>
+          <p:cNvSpPr/>
+          <p:nvPr/>
+        </p:nvSpPr>
+        <p:spPr>
+          <a:xfrm>
+            <a:off x="7893761" y="91440"/>
+            <a:ext cx="73152" cy="274320"/>
+          </a:xfrm>
+          <a:prstGeom prst="rect">
+            <a:avLst/>
+          </a:prstGeom>
+          <a:solidFill>
+            <a:srgbClr val="0369A1"/>
+          </a:solidFill>
+          <a:ln w="12700">
+            <a:solidFill>
+              <a:srgbClr val="0369A1"/>
+            </a:solidFill>
+            <a:prstDash val="solid"/>
+          </a:ln>
+        </p:spPr>
+      </p:sp>
       <p:pic>
         <p:nvPicPr>
-          <p:cNvPr id="5" name="Image 0" descr="preencoded.png">    </p:cNvPr>
+          <p:cNvPr id="6" name="Image 0" descr="preencoded.png">    </p:cNvPr>
           <p:cNvPicPr>
             <a:picLocks noChangeAspect="1"/>
           </p:cNvPicPr>
@@ -16759,6 +18447,83 @@
         </p:blipFill>
         <p:spPr>
           <a:xfrm>
+            <a:off x="8021777" y="128016"/>
+            <a:ext cx="201168" cy="201168"/>
+          </a:xfrm>
+          <a:prstGeom prst="rect">
+            <a:avLst/>
+          </a:prstGeom>
+        </p:spPr>
+      </p:pic>
+      <p:sp>
+        <p:nvSpPr>
+          <p:cNvPr id="7" name="Text 4"/>
+          <p:cNvSpPr txBox="1"/>
+          <p:nvPr/>
+        </p:nvSpPr>
+        <p:spPr>
+          <a:xfrm>
+            <a:off x="8277809" y="91440"/>
+            <a:ext cx="3328670" cy="274320"/>
+          </a:xfrm>
+          <a:prstGeom prst="rect">
+            <a:avLst/>
+          </a:prstGeom>
+          <a:noFill/>
+          <a:ln/>
+        </p:spPr>
+        <p:txBody>
+          <a:bodyPr wrap="square" lIns="0" tIns="0" rIns="0" bIns="0" rtlCol="0" anchor="ctr"/>
+          <a:lstStyle/>
+          <a:p>
+            <a:pPr indent="0" marL="0">
+              <a:buNone/>
+            </a:pPr>
+            <a:r>
+              <a:rPr lang="en-US" sz="1100" b="1" dirty="0">
+                <a:solidFill>
+                  <a:srgbClr val="075985"/>
+                </a:solidFill>
+                <a:latin typeface="Calibri" pitchFamily="34" charset="0"/>
+                <a:ea typeface="Calibri" pitchFamily="34" charset="-122"/>
+                <a:cs typeface="Calibri" pitchFamily="34" charset="-120"/>
+              </a:rPr>
+              <a:t>UNDERSTAND NOW</a:t>
+            </a:r>
+            <a:pPr indent="0" marL="0">
+              <a:buNone/>
+            </a:pPr>
+            <a:r>
+              <a:rPr lang="en-US" sz="1100" dirty="0">
+                <a:solidFill>
+                  <a:srgbClr val="075985"/>
+                </a:solidFill>
+                <a:latin typeface="Calibri" pitchFamily="34" charset="0"/>
+                <a:ea typeface="Calibri" pitchFamily="34" charset="-122"/>
+                <a:cs typeface="Calibri" pitchFamily="34" charset="-120"/>
+              </a:rPr>
+              <a:t> · voltage, current, Ohm's law</a:t>
+            </a:r>
+            <a:endParaRPr lang="en-US" sz="1100" dirty="0"/>
+          </a:p>
+        </p:txBody>
+      </p:sp>
+      <p:pic>
+        <p:nvPicPr>
+          <p:cNvPr id="9" name="Image 1" descr="preencoded.png">    </p:cNvPr>
+          <p:cNvPicPr>
+            <a:picLocks noChangeAspect="1"/>
+          </p:cNvPicPr>
+          <p:nvPr/>
+        </p:nvPicPr>
+        <p:blipFill>
+          <a:blip r:embed="rId2"/>
+          <a:stretch>
+            <a:fillRect/>
+          </a:stretch>
+        </p:blipFill>
+        <p:spPr>
+          <a:xfrm>
             <a:off x="731520" y="2193978"/>
             <a:ext cx="3840480" cy="3201564"/>
           </a:xfrm>
@@ -16769,7 +18534,7 @@
       </p:pic>
       <p:sp>
         <p:nvSpPr>
-          <p:cNvPr id="6" name="Text 2"/>
+          <p:cNvPr id="10" name="Text 5"/>
           <p:cNvSpPr txBox="1"/>
           <p:nvPr/>
         </p:nvSpPr>
@@ -16808,7 +18573,7 @@
       </p:sp>
       <p:sp>
         <p:nvSpPr>
-          <p:cNvPr id="7" name="Shape 3"/>
+          <p:cNvPr id="11" name="Shape 6"/>
           <p:cNvSpPr/>
           <p:nvPr/>
         </p:nvSpPr>
@@ -16833,7 +18598,7 @@
       </p:sp>
       <p:sp>
         <p:nvSpPr>
-          <p:cNvPr id="8" name="Text 4"/>
+          <p:cNvPr id="12" name="Text 7"/>
           <p:cNvSpPr txBox="1"/>
           <p:nvPr/>
         </p:nvSpPr>
@@ -16875,7 +18640,7 @@
       </p:sp>
       <p:sp>
         <p:nvSpPr>
-          <p:cNvPr id="9" name="Shape 5"/>
+          <p:cNvPr id="13" name="Shape 8"/>
           <p:cNvSpPr/>
           <p:nvPr/>
         </p:nvSpPr>
@@ -16900,7 +18665,7 @@
       </p:sp>
       <p:sp>
         <p:nvSpPr>
-          <p:cNvPr id="10" name="Text 6"/>
+          <p:cNvPr id="14" name="Text 9"/>
           <p:cNvSpPr txBox="1"/>
           <p:nvPr/>
         </p:nvSpPr>
@@ -16942,7 +18707,7 @@
       </p:sp>
       <p:sp>
         <p:nvSpPr>
-          <p:cNvPr id="11" name="Shape 7"/>
+          <p:cNvPr id="15" name="Shape 10"/>
           <p:cNvSpPr/>
           <p:nvPr/>
         </p:nvSpPr>
@@ -16967,7 +18732,7 @@
       </p:sp>
       <p:sp>
         <p:nvSpPr>
-          <p:cNvPr id="12" name="Text 8"/>
+          <p:cNvPr id="16" name="Text 11"/>
           <p:cNvSpPr txBox="1"/>
           <p:nvPr/>
         </p:nvSpPr>
@@ -17009,7 +18774,7 @@
       </p:sp>
       <p:sp>
         <p:nvSpPr>
-          <p:cNvPr id="13" name="Shape 9"/>
+          <p:cNvPr id="17" name="Shape 12"/>
           <p:cNvSpPr/>
           <p:nvPr/>
         </p:nvSpPr>
@@ -17034,7 +18799,7 @@
       </p:sp>
       <p:sp>
         <p:nvSpPr>
-          <p:cNvPr id="14" name="Text 10"/>
+          <p:cNvPr id="18" name="Text 13"/>
           <p:cNvSpPr txBox="1"/>
           <p:nvPr/>
         </p:nvSpPr>
@@ -17630,9 +19395,59 @@
           </a:ln>
         </p:spPr>
       </p:sp>
+      <p:sp>
+        <p:nvSpPr>
+          <p:cNvPr id="14" name="Shape 12"/>
+          <p:cNvSpPr/>
+          <p:nvPr/>
+        </p:nvSpPr>
+        <p:spPr>
+          <a:xfrm>
+            <a:off x="7893761" y="91440"/>
+            <a:ext cx="3749294" cy="274320"/>
+          </a:xfrm>
+          <a:prstGeom prst="rect">
+            <a:avLst/>
+          </a:prstGeom>
+          <a:solidFill>
+            <a:srgbClr val="E0F2FE"/>
+          </a:solidFill>
+          <a:ln w="12700">
+            <a:solidFill>
+              <a:srgbClr val="0369A1"/>
+            </a:solidFill>
+            <a:prstDash val="solid"/>
+          </a:ln>
+        </p:spPr>
+      </p:sp>
+      <p:sp>
+        <p:nvSpPr>
+          <p:cNvPr id="15" name="Shape 13"/>
+          <p:cNvSpPr/>
+          <p:nvPr/>
+        </p:nvSpPr>
+        <p:spPr>
+          <a:xfrm>
+            <a:off x="7893761" y="91440"/>
+            <a:ext cx="73152" cy="274320"/>
+          </a:xfrm>
+          <a:prstGeom prst="rect">
+            <a:avLst/>
+          </a:prstGeom>
+          <a:solidFill>
+            <a:srgbClr val="0369A1"/>
+          </a:solidFill>
+          <a:ln w="12700">
+            <a:solidFill>
+              <a:srgbClr val="0369A1"/>
+            </a:solidFill>
+            <a:prstDash val="solid"/>
+          </a:ln>
+        </p:spPr>
+      </p:sp>
       <p:pic>
         <p:nvPicPr>
-          <p:cNvPr id="15" name="Image 0" descr="preencoded.png">    </p:cNvPr>
+          <p:cNvPr id="16" name="Image 0" descr="preencoded.png">    </p:cNvPr>
           <p:cNvPicPr>
             <a:picLocks noChangeAspect="1"/>
           </p:cNvPicPr>
@@ -17640,6 +19455,83 @@
         </p:nvPicPr>
         <p:blipFill>
           <a:blip r:embed="rId1"/>
+          <a:stretch>
+            <a:fillRect/>
+          </a:stretch>
+        </p:blipFill>
+        <p:spPr>
+          <a:xfrm>
+            <a:off x="8021777" y="128016"/>
+            <a:ext cx="201168" cy="201168"/>
+          </a:xfrm>
+          <a:prstGeom prst="rect">
+            <a:avLst/>
+          </a:prstGeom>
+        </p:spPr>
+      </p:pic>
+      <p:sp>
+        <p:nvSpPr>
+          <p:cNvPr id="17" name="Text 14"/>
+          <p:cNvSpPr txBox="1"/>
+          <p:nvPr/>
+        </p:nvSpPr>
+        <p:spPr>
+          <a:xfrm>
+            <a:off x="8277809" y="91440"/>
+            <a:ext cx="3328670" cy="274320"/>
+          </a:xfrm>
+          <a:prstGeom prst="rect">
+            <a:avLst/>
+          </a:prstGeom>
+          <a:noFill/>
+          <a:ln/>
+        </p:spPr>
+        <p:txBody>
+          <a:bodyPr wrap="square" lIns="0" tIns="0" rIns="0" bIns="0" rtlCol="0" anchor="ctr"/>
+          <a:lstStyle/>
+          <a:p>
+            <a:pPr indent="0" marL="0">
+              <a:buNone/>
+            </a:pPr>
+            <a:r>
+              <a:rPr lang="en-US" sz="1100" b="1" dirty="0">
+                <a:solidFill>
+                  <a:srgbClr val="075985"/>
+                </a:solidFill>
+                <a:latin typeface="Calibri" pitchFamily="34" charset="0"/>
+                <a:ea typeface="Calibri" pitchFamily="34" charset="-122"/>
+                <a:cs typeface="Calibri" pitchFamily="34" charset="-120"/>
+              </a:rPr>
+              <a:t>UNDERSTAND NOW</a:t>
+            </a:r>
+            <a:pPr indent="0" marL="0">
+              <a:buNone/>
+            </a:pPr>
+            <a:r>
+              <a:rPr lang="en-US" sz="1100" dirty="0">
+                <a:solidFill>
+                  <a:srgbClr val="075985"/>
+                </a:solidFill>
+                <a:latin typeface="Calibri" pitchFamily="34" charset="0"/>
+                <a:ea typeface="Calibri" pitchFamily="34" charset="-122"/>
+                <a:cs typeface="Calibri" pitchFamily="34" charset="-120"/>
+              </a:rPr>
+              <a:t> · voltage, current, Ohm's law</a:t>
+            </a:r>
+            <a:endParaRPr lang="en-US" sz="1100" dirty="0"/>
+          </a:p>
+        </p:txBody>
+      </p:sp>
+      <p:pic>
+        <p:nvPicPr>
+          <p:cNvPr id="19" name="Image 1" descr="preencoded.png">    </p:cNvPr>
+          <p:cNvPicPr>
+            <a:picLocks noChangeAspect="1"/>
+          </p:cNvPicPr>
+          <p:nvPr/>
+        </p:nvPicPr>
+        <p:blipFill>
+          <a:blip r:embed="rId2"/>
           <a:stretch>
             <a:fillRect/>
           </a:stretch>
@@ -18230,6 +20122,133 @@
       </p:sp>
       <p:sp>
         <p:nvSpPr>
+          <p:cNvPr id="16" name="Shape 14"/>
+          <p:cNvSpPr/>
+          <p:nvPr/>
+        </p:nvSpPr>
+        <p:spPr>
+          <a:xfrm>
+            <a:off x="7893761" y="91440"/>
+            <a:ext cx="3749294" cy="274320"/>
+          </a:xfrm>
+          <a:prstGeom prst="rect">
+            <a:avLst/>
+          </a:prstGeom>
+          <a:solidFill>
+            <a:srgbClr val="E0F2FE"/>
+          </a:solidFill>
+          <a:ln w="12700">
+            <a:solidFill>
+              <a:srgbClr val="0369A1"/>
+            </a:solidFill>
+            <a:prstDash val="solid"/>
+          </a:ln>
+        </p:spPr>
+      </p:sp>
+      <p:sp>
+        <p:nvSpPr>
+          <p:cNvPr id="17" name="Shape 15"/>
+          <p:cNvSpPr/>
+          <p:nvPr/>
+        </p:nvSpPr>
+        <p:spPr>
+          <a:xfrm>
+            <a:off x="7893761" y="91440"/>
+            <a:ext cx="73152" cy="274320"/>
+          </a:xfrm>
+          <a:prstGeom prst="rect">
+            <a:avLst/>
+          </a:prstGeom>
+          <a:solidFill>
+            <a:srgbClr val="0369A1"/>
+          </a:solidFill>
+          <a:ln w="12700">
+            <a:solidFill>
+              <a:srgbClr val="0369A1"/>
+            </a:solidFill>
+            <a:prstDash val="solid"/>
+          </a:ln>
+        </p:spPr>
+      </p:sp>
+      <p:pic>
+        <p:nvPicPr>
+          <p:cNvPr id="18" name="Image 0" descr="preencoded.png">    </p:cNvPr>
+          <p:cNvPicPr>
+            <a:picLocks noChangeAspect="1"/>
+          </p:cNvPicPr>
+          <p:nvPr/>
+        </p:nvPicPr>
+        <p:blipFill>
+          <a:blip r:embed="rId1"/>
+          <a:stretch>
+            <a:fillRect/>
+          </a:stretch>
+        </p:blipFill>
+        <p:spPr>
+          <a:xfrm>
+            <a:off x="8021777" y="128016"/>
+            <a:ext cx="201168" cy="201168"/>
+          </a:xfrm>
+          <a:prstGeom prst="rect">
+            <a:avLst/>
+          </a:prstGeom>
+        </p:spPr>
+      </p:pic>
+      <p:sp>
+        <p:nvSpPr>
+          <p:cNvPr id="19" name="Text 16"/>
+          <p:cNvSpPr txBox="1"/>
+          <p:nvPr/>
+        </p:nvSpPr>
+        <p:spPr>
+          <a:xfrm>
+            <a:off x="8277809" y="91440"/>
+            <a:ext cx="3328670" cy="274320"/>
+          </a:xfrm>
+          <a:prstGeom prst="rect">
+            <a:avLst/>
+          </a:prstGeom>
+          <a:noFill/>
+          <a:ln/>
+        </p:spPr>
+        <p:txBody>
+          <a:bodyPr wrap="square" lIns="0" tIns="0" rIns="0" bIns="0" rtlCol="0" anchor="ctr"/>
+          <a:lstStyle/>
+          <a:p>
+            <a:pPr indent="0" marL="0">
+              <a:buNone/>
+            </a:pPr>
+            <a:r>
+              <a:rPr lang="en-US" sz="1100" b="1" dirty="0">
+                <a:solidFill>
+                  <a:srgbClr val="075985"/>
+                </a:solidFill>
+                <a:latin typeface="Calibri" pitchFamily="34" charset="0"/>
+                <a:ea typeface="Calibri" pitchFamily="34" charset="-122"/>
+                <a:cs typeface="Calibri" pitchFamily="34" charset="-120"/>
+              </a:rPr>
+              <a:t>UNDERSTAND NOW</a:t>
+            </a:r>
+            <a:pPr indent="0" marL="0">
+              <a:buNone/>
+            </a:pPr>
+            <a:r>
+              <a:rPr lang="en-US" sz="1100" dirty="0">
+                <a:solidFill>
+                  <a:srgbClr val="075985"/>
+                </a:solidFill>
+                <a:latin typeface="Calibri" pitchFamily="34" charset="0"/>
+                <a:ea typeface="Calibri" pitchFamily="34" charset="-122"/>
+                <a:cs typeface="Calibri" pitchFamily="34" charset="-120"/>
+              </a:rPr>
+              <a:t> · voltage, current, Ohm's law</a:t>
+            </a:r>
+            <a:endParaRPr lang="en-US" sz="1100" dirty="0"/>
+          </a:p>
+        </p:txBody>
+      </p:sp>
+      <p:sp>
+        <p:nvSpPr>
           <p:cNvPr id="25" name="Slide Number Placeholder 0"/>
           <p:cNvSpPr>
             <a:spLocks noGrp="1"/>
@@ -18819,6 +20838,133 @@
               <a:t>silicon: element 14, a semiconductor, the raw material of almost every chip</a:t>
             </a:r>
             <a:endParaRPr lang="en-US" sz="1900" dirty="0"/>
+          </a:p>
+        </p:txBody>
+      </p:sp>
+      <p:sp>
+        <p:nvSpPr>
+          <p:cNvPr id="16" name="Shape 14"/>
+          <p:cNvSpPr/>
+          <p:nvPr/>
+        </p:nvSpPr>
+        <p:spPr>
+          <a:xfrm>
+            <a:off x="7959420" y="91440"/>
+            <a:ext cx="3683635" cy="274320"/>
+          </a:xfrm>
+          <a:prstGeom prst="rect">
+            <a:avLst/>
+          </a:prstGeom>
+          <a:solidFill>
+            <a:srgbClr val="E0F2FE"/>
+          </a:solidFill>
+          <a:ln w="12700">
+            <a:solidFill>
+              <a:srgbClr val="0369A1"/>
+            </a:solidFill>
+            <a:prstDash val="solid"/>
+          </a:ln>
+        </p:spPr>
+      </p:sp>
+      <p:sp>
+        <p:nvSpPr>
+          <p:cNvPr id="17" name="Shape 15"/>
+          <p:cNvSpPr/>
+          <p:nvPr/>
+        </p:nvSpPr>
+        <p:spPr>
+          <a:xfrm>
+            <a:off x="7959420" y="91440"/>
+            <a:ext cx="73152" cy="274320"/>
+          </a:xfrm>
+          <a:prstGeom prst="rect">
+            <a:avLst/>
+          </a:prstGeom>
+          <a:solidFill>
+            <a:srgbClr val="0369A1"/>
+          </a:solidFill>
+          <a:ln w="12700">
+            <a:solidFill>
+              <a:srgbClr val="0369A1"/>
+            </a:solidFill>
+            <a:prstDash val="solid"/>
+          </a:ln>
+        </p:spPr>
+      </p:sp>
+      <p:pic>
+        <p:nvPicPr>
+          <p:cNvPr id="18" name="Image 0" descr="preencoded.png">    </p:cNvPr>
+          <p:cNvPicPr>
+            <a:picLocks noChangeAspect="1"/>
+          </p:cNvPicPr>
+          <p:nvPr/>
+        </p:nvPicPr>
+        <p:blipFill>
+          <a:blip r:embed="rId1"/>
+          <a:stretch>
+            <a:fillRect/>
+          </a:stretch>
+        </p:blipFill>
+        <p:spPr>
+          <a:xfrm>
+            <a:off x="8087436" y="128016"/>
+            <a:ext cx="201168" cy="201168"/>
+          </a:xfrm>
+          <a:prstGeom prst="rect">
+            <a:avLst/>
+          </a:prstGeom>
+        </p:spPr>
+      </p:pic>
+      <p:sp>
+        <p:nvSpPr>
+          <p:cNvPr id="19" name="Text 16"/>
+          <p:cNvSpPr txBox="1"/>
+          <p:nvPr/>
+        </p:nvSpPr>
+        <p:spPr>
+          <a:xfrm>
+            <a:off x="8343468" y="91440"/>
+            <a:ext cx="3263011" cy="274320"/>
+          </a:xfrm>
+          <a:prstGeom prst="rect">
+            <a:avLst/>
+          </a:prstGeom>
+          <a:noFill/>
+          <a:ln/>
+        </p:spPr>
+        <p:txBody>
+          <a:bodyPr wrap="square" lIns="0" tIns="0" rIns="0" bIns="0" rtlCol="0" anchor="ctr"/>
+          <a:lstStyle/>
+          <a:p>
+            <a:pPr indent="0" marL="0">
+              <a:buNone/>
+            </a:pPr>
+            <a:r>
+              <a:rPr lang="en-US" sz="1100" b="1" dirty="0">
+                <a:solidFill>
+                  <a:srgbClr val="075985"/>
+                </a:solidFill>
+                <a:latin typeface="Calibri" pitchFamily="34" charset="0"/>
+                <a:ea typeface="Calibri" pitchFamily="34" charset="-122"/>
+                <a:cs typeface="Calibri" pitchFamily="34" charset="-120"/>
+              </a:rPr>
+              <a:t>UNDERSTAND NOW</a:t>
+            </a:r>
+            <a:pPr indent="0" marL="0">
+              <a:buNone/>
+            </a:pPr>
+            <a:r>
+              <a:rPr lang="en-US" sz="1100" dirty="0">
+                <a:solidFill>
+                  <a:srgbClr val="075985"/>
+                </a:solidFill>
+                <a:latin typeface="Calibri" pitchFamily="34" charset="0"/>
+                <a:ea typeface="Calibri" pitchFamily="34" charset="-122"/>
+                <a:cs typeface="Calibri" pitchFamily="34" charset="-120"/>
+              </a:rPr>
+              <a:t> · the transistor as a switch</a:t>
+            </a:r>
+            <a:endParaRPr lang="en-US" sz="1100" dirty="0"/>
           </a:p>
         </p:txBody>
       </p:sp>
@@ -20411,6 +22557,133 @@
       </p:graphicFrame>
       <p:sp>
         <p:nvSpPr>
+          <p:cNvPr id="4" name="Shape 1"/>
+          <p:cNvSpPr/>
+          <p:nvPr/>
+        </p:nvSpPr>
+        <p:spPr>
+          <a:xfrm>
+            <a:off x="7959420" y="91440"/>
+            <a:ext cx="3683635" cy="274320"/>
+          </a:xfrm>
+          <a:prstGeom prst="rect">
+            <a:avLst/>
+          </a:prstGeom>
+          <a:solidFill>
+            <a:srgbClr val="E0F2FE"/>
+          </a:solidFill>
+          <a:ln w="12700">
+            <a:solidFill>
+              <a:srgbClr val="0369A1"/>
+            </a:solidFill>
+            <a:prstDash val="solid"/>
+          </a:ln>
+        </p:spPr>
+      </p:sp>
+      <p:sp>
+        <p:nvSpPr>
+          <p:cNvPr id="5" name="Shape 2"/>
+          <p:cNvSpPr/>
+          <p:nvPr/>
+        </p:nvSpPr>
+        <p:spPr>
+          <a:xfrm>
+            <a:off x="7959420" y="91440"/>
+            <a:ext cx="73152" cy="274320"/>
+          </a:xfrm>
+          <a:prstGeom prst="rect">
+            <a:avLst/>
+          </a:prstGeom>
+          <a:solidFill>
+            <a:srgbClr val="0369A1"/>
+          </a:solidFill>
+          <a:ln w="12700">
+            <a:solidFill>
+              <a:srgbClr val="0369A1"/>
+            </a:solidFill>
+            <a:prstDash val="solid"/>
+          </a:ln>
+        </p:spPr>
+      </p:sp>
+      <p:pic>
+        <p:nvPicPr>
+          <p:cNvPr id="6" name="Image 0" descr="preencoded.png">    </p:cNvPr>
+          <p:cNvPicPr>
+            <a:picLocks noChangeAspect="1"/>
+          </p:cNvPicPr>
+          <p:nvPr/>
+        </p:nvPicPr>
+        <p:blipFill>
+          <a:blip r:embed="rId1"/>
+          <a:stretch>
+            <a:fillRect/>
+          </a:stretch>
+        </p:blipFill>
+        <p:spPr>
+          <a:xfrm>
+            <a:off x="8087436" y="128016"/>
+            <a:ext cx="201168" cy="201168"/>
+          </a:xfrm>
+          <a:prstGeom prst="rect">
+            <a:avLst/>
+          </a:prstGeom>
+        </p:spPr>
+      </p:pic>
+      <p:sp>
+        <p:nvSpPr>
+          <p:cNvPr id="7" name="Text 3"/>
+          <p:cNvSpPr txBox="1"/>
+          <p:nvPr/>
+        </p:nvSpPr>
+        <p:spPr>
+          <a:xfrm>
+            <a:off x="8343468" y="91440"/>
+            <a:ext cx="3263011" cy="274320"/>
+          </a:xfrm>
+          <a:prstGeom prst="rect">
+            <a:avLst/>
+          </a:prstGeom>
+          <a:noFill/>
+          <a:ln/>
+        </p:spPr>
+        <p:txBody>
+          <a:bodyPr wrap="square" lIns="0" tIns="0" rIns="0" bIns="0" rtlCol="0" anchor="ctr"/>
+          <a:lstStyle/>
+          <a:p>
+            <a:pPr indent="0" marL="0">
+              <a:buNone/>
+            </a:pPr>
+            <a:r>
+              <a:rPr lang="en-US" sz="1100" b="1" dirty="0">
+                <a:solidFill>
+                  <a:srgbClr val="075985"/>
+                </a:solidFill>
+                <a:latin typeface="Calibri" pitchFamily="34" charset="0"/>
+                <a:ea typeface="Calibri" pitchFamily="34" charset="-122"/>
+                <a:cs typeface="Calibri" pitchFamily="34" charset="-120"/>
+              </a:rPr>
+              <a:t>UNDERSTAND NOW</a:t>
+            </a:r>
+            <a:pPr indent="0" marL="0">
+              <a:buNone/>
+            </a:pPr>
+            <a:r>
+              <a:rPr lang="en-US" sz="1100" dirty="0">
+                <a:solidFill>
+                  <a:srgbClr val="075985"/>
+                </a:solidFill>
+                <a:latin typeface="Calibri" pitchFamily="34" charset="0"/>
+                <a:ea typeface="Calibri" pitchFamily="34" charset="-122"/>
+                <a:cs typeface="Calibri" pitchFamily="34" charset="-120"/>
+              </a:rPr>
+              <a:t> · the transistor as a switch</a:t>
+            </a:r>
+            <a:endParaRPr lang="en-US" sz="1100" dirty="0"/>
+          </a:p>
+        </p:txBody>
+      </p:sp>
+      <p:sp>
+        <p:nvSpPr>
           <p:cNvPr id="25" name="Slide Number Placeholder 0"/>
           <p:cNvSpPr>
             <a:spLocks noGrp="1"/>
@@ -20577,9 +22850,59 @@
           </a:ln>
         </p:spPr>
       </p:sp>
+      <p:sp>
+        <p:nvSpPr>
+          <p:cNvPr id="5" name="Shape 3"/>
+          <p:cNvSpPr/>
+          <p:nvPr/>
+        </p:nvSpPr>
+        <p:spPr>
+          <a:xfrm>
+            <a:off x="7959420" y="91440"/>
+            <a:ext cx="3683635" cy="274320"/>
+          </a:xfrm>
+          <a:prstGeom prst="rect">
+            <a:avLst/>
+          </a:prstGeom>
+          <a:solidFill>
+            <a:srgbClr val="E0F2FE"/>
+          </a:solidFill>
+          <a:ln w="12700">
+            <a:solidFill>
+              <a:srgbClr val="0369A1"/>
+            </a:solidFill>
+            <a:prstDash val="solid"/>
+          </a:ln>
+        </p:spPr>
+      </p:sp>
+      <p:sp>
+        <p:nvSpPr>
+          <p:cNvPr id="6" name="Shape 4"/>
+          <p:cNvSpPr/>
+          <p:nvPr/>
+        </p:nvSpPr>
+        <p:spPr>
+          <a:xfrm>
+            <a:off x="7959420" y="91440"/>
+            <a:ext cx="73152" cy="274320"/>
+          </a:xfrm>
+          <a:prstGeom prst="rect">
+            <a:avLst/>
+          </a:prstGeom>
+          <a:solidFill>
+            <a:srgbClr val="0369A1"/>
+          </a:solidFill>
+          <a:ln w="12700">
+            <a:solidFill>
+              <a:srgbClr val="0369A1"/>
+            </a:solidFill>
+            <a:prstDash val="solid"/>
+          </a:ln>
+        </p:spPr>
+      </p:sp>
       <p:pic>
         <p:nvPicPr>
-          <p:cNvPr id="6" name="Image 0" descr="preencoded.png">    </p:cNvPr>
+          <p:cNvPr id="7" name="Image 0" descr="preencoded.png">    </p:cNvPr>
           <p:cNvPicPr>
             <a:picLocks noChangeAspect="1"/>
           </p:cNvPicPr>
@@ -20593,17 +22916,70 @@
         </p:blipFill>
         <p:spPr>
           <a:xfrm>
-            <a:off x="973325" y="1828800"/>
-            <a:ext cx="2168150" cy="1737360"/>
+            <a:off x="8087436" y="128016"/>
+            <a:ext cx="201168" cy="201168"/>
           </a:xfrm>
           <a:prstGeom prst="rect">
             <a:avLst/>
           </a:prstGeom>
         </p:spPr>
       </p:pic>
+      <p:sp>
+        <p:nvSpPr>
+          <p:cNvPr id="8" name="Text 5"/>
+          <p:cNvSpPr txBox="1"/>
+          <p:nvPr/>
+        </p:nvSpPr>
+        <p:spPr>
+          <a:xfrm>
+            <a:off x="8343468" y="91440"/>
+            <a:ext cx="3263011" cy="274320"/>
+          </a:xfrm>
+          <a:prstGeom prst="rect">
+            <a:avLst/>
+          </a:prstGeom>
+          <a:noFill/>
+          <a:ln/>
+        </p:spPr>
+        <p:txBody>
+          <a:bodyPr wrap="square" lIns="0" tIns="0" rIns="0" bIns="0" rtlCol="0" anchor="ctr"/>
+          <a:lstStyle/>
+          <a:p>
+            <a:pPr indent="0" marL="0">
+              <a:buNone/>
+            </a:pPr>
+            <a:r>
+              <a:rPr lang="en-US" sz="1100" b="1" dirty="0">
+                <a:solidFill>
+                  <a:srgbClr val="075985"/>
+                </a:solidFill>
+                <a:latin typeface="Calibri" pitchFamily="34" charset="0"/>
+                <a:ea typeface="Calibri" pitchFamily="34" charset="-122"/>
+                <a:cs typeface="Calibri" pitchFamily="34" charset="-120"/>
+              </a:rPr>
+              <a:t>UNDERSTAND NOW</a:t>
+            </a:r>
+            <a:pPr indent="0" marL="0">
+              <a:buNone/>
+            </a:pPr>
+            <a:r>
+              <a:rPr lang="en-US" sz="1100" dirty="0">
+                <a:solidFill>
+                  <a:srgbClr val="075985"/>
+                </a:solidFill>
+                <a:latin typeface="Calibri" pitchFamily="34" charset="0"/>
+                <a:ea typeface="Calibri" pitchFamily="34" charset="-122"/>
+                <a:cs typeface="Calibri" pitchFamily="34" charset="-120"/>
+              </a:rPr>
+              <a:t> · the transistor as a switch</a:t>
+            </a:r>
+            <a:endParaRPr lang="en-US" sz="1100" dirty="0"/>
+          </a:p>
+        </p:txBody>
+      </p:sp>
       <p:pic>
         <p:nvPicPr>
-          <p:cNvPr id="7" name="Image 1" descr="preencoded.png">    </p:cNvPr>
+          <p:cNvPr id="10" name="Image 1" descr="preencoded.png">    </p:cNvPr>
           <p:cNvPicPr>
             <a:picLocks noChangeAspect="1"/>
           </p:cNvPicPr>
@@ -20617,6 +22993,30 @@
         </p:blipFill>
         <p:spPr>
           <a:xfrm>
+            <a:off x="973325" y="1828800"/>
+            <a:ext cx="2168150" cy="1737360"/>
+          </a:xfrm>
+          <a:prstGeom prst="rect">
+            <a:avLst/>
+          </a:prstGeom>
+        </p:spPr>
+      </p:pic>
+      <p:pic>
+        <p:nvPicPr>
+          <p:cNvPr id="11" name="Image 2" descr="preencoded.png">    </p:cNvPr>
+          <p:cNvPicPr>
+            <a:picLocks noChangeAspect="1"/>
+          </p:cNvPicPr>
+          <p:nvPr/>
+        </p:nvPicPr>
+        <p:blipFill>
+          <a:blip r:embed="rId3"/>
+          <a:stretch>
+            <a:fillRect/>
+          </a:stretch>
+        </p:blipFill>
+        <p:spPr>
+          <a:xfrm>
             <a:off x="973325" y="4297680"/>
             <a:ext cx="2168150" cy="1737360"/>
           </a:xfrm>
@@ -20627,7 +23027,7 @@
       </p:pic>
       <p:sp>
         <p:nvSpPr>
-          <p:cNvPr id="8" name="Text 3"/>
+          <p:cNvPr id="12" name="Text 6"/>
           <p:cNvSpPr txBox="1"/>
           <p:nvPr/>
         </p:nvSpPr>
@@ -20666,7 +23066,7 @@
       </p:sp>
       <p:sp>
         <p:nvSpPr>
-          <p:cNvPr id="9" name="Text 4"/>
+          <p:cNvPr id="13" name="Text 7"/>
           <p:cNvSpPr txBox="1"/>
           <p:nvPr/>
         </p:nvSpPr>
@@ -21354,7 +23754,7 @@
       </p:graphicFrame>
       <p:sp>
         <p:nvSpPr>
-          <p:cNvPr id="11" name="Shape 5"/>
+          <p:cNvPr id="15" name="Shape 8"/>
           <p:cNvSpPr/>
           <p:nvPr/>
         </p:nvSpPr>
@@ -21379,7 +23779,7 @@
       </p:sp>
       <p:sp>
         <p:nvSpPr>
-          <p:cNvPr id="12" name="Text 6"/>
+          <p:cNvPr id="16" name="Text 9"/>
           <p:cNvSpPr txBox="1"/>
           <p:nvPr/>
         </p:nvSpPr>
@@ -21421,7 +23821,7 @@
       </p:sp>
       <p:sp>
         <p:nvSpPr>
-          <p:cNvPr id="13" name="Shape 7"/>
+          <p:cNvPr id="17" name="Shape 10"/>
           <p:cNvSpPr/>
           <p:nvPr/>
         </p:nvSpPr>
@@ -21446,7 +23846,7 @@
       </p:sp>
       <p:sp>
         <p:nvSpPr>
-          <p:cNvPr id="14" name="Text 8"/>
+          <p:cNvPr id="18" name="Text 11"/>
           <p:cNvSpPr txBox="1"/>
           <p:nvPr/>
         </p:nvSpPr>
@@ -21488,7 +23888,7 @@
       </p:sp>
       <p:sp>
         <p:nvSpPr>
-          <p:cNvPr id="15" name="Shape 9"/>
+          <p:cNvPr id="19" name="Shape 12"/>
           <p:cNvSpPr/>
           <p:nvPr/>
         </p:nvSpPr>
@@ -21513,7 +23913,7 @@
       </p:sp>
       <p:sp>
         <p:nvSpPr>
-          <p:cNvPr id="16" name="Text 10"/>
+          <p:cNvPr id="20" name="Text 13"/>
           <p:cNvSpPr txBox="1"/>
           <p:nvPr/>
         </p:nvSpPr>
@@ -21555,7 +23955,7 @@
       </p:sp>
       <p:sp>
         <p:nvSpPr>
-          <p:cNvPr id="17" name="Shape 11"/>
+          <p:cNvPr id="21" name="Shape 14"/>
           <p:cNvSpPr/>
           <p:nvPr/>
         </p:nvSpPr>
@@ -21580,7 +23980,7 @@
       </p:sp>
       <p:sp>
         <p:nvSpPr>
-          <p:cNvPr id="18" name="Text 12"/>
+          <p:cNvPr id="22" name="Text 15"/>
           <p:cNvSpPr txBox="1"/>
           <p:nvPr/>
         </p:nvSpPr>

--- a/en/slides/10-Computer_Architecture-Electronics.pptx
+++ b/en/slides/10-Computer_Architecture-Electronics.pptx
@@ -126,13 +126,13 @@
   <p:extLst>
     <p:ext uri="{521415D9-36F7-43E2-AB2F-B90AF26B5E84}">
       <p14:sectionLst xmlns:p14="http://schemas.microsoft.com/office/powerpoint/2010/main">
-        <p14:section name="Opening" id="{17616a14-e725-c054-e1c8-21a3043127b0}">
+        <p14:section name="Opening" id="{5d4a0b1d-e773-4690-92e8-aa921f27ddb1}">
           <p14:sldIdLst>
             <p14:sldId id="256"/>
             <p14:sldId id="257"/>
           </p14:sldIdLst>
         </p14:section>
-        <p14:section name="Electricity in four quantities" id="{d0b34115-2d93-543b-2aa5-3370a0a1497b}">
+        <p14:section name="Electricity in four quantities" id="{9fb69d49-2ac3-91ba-4db3-847e05c7281e}">
           <p14:sldIdLst>
             <p14:sldId id="258"/>
             <p14:sldId id="259"/>
@@ -140,14 +140,14 @@
             <p14:sldId id="261"/>
           </p14:sldIdLst>
         </p14:section>
-        <p14:section name="Semiconductors" id="{69ec1a51-0633-41e3-4ab2-9d73b0d6ec0d}">
+        <p14:section name="Semiconductors" id="{e49f5d84-6f52-c34c-c723-7551f005695d}">
           <p14:sldIdLst>
             <p14:sldId id="262"/>
             <p14:sldId id="263"/>
             <p14:sldId id="264"/>
           </p14:sldIdLst>
         </p14:section>
-        <p14:section name="From volts to bits" id="{f618e2d9-7316-3de7-b192-2cba25bd11ce}">
+        <p14:section name="From volts to bits" id="{fe97efbd-09cc-c6f5-a2c5-42e093afc4a6}">
           <p14:sldIdLst>
             <p14:sldId id="265"/>
             <p14:sldId id="266"/>
@@ -157,7 +157,7 @@
             <p14:sldId id="270"/>
           </p14:sldIdLst>
         </p14:section>
-        <p14:section name="Back to the machine" id="{337e7e0e-9215-d6c5-17d7-5a009e2f706a}">
+        <p14:section name="Back to the machine" id="{d2836125-e301-5b23-b56e-1312f5ad1ff1}">
           <p14:sldIdLst>
             <p14:sldId id="271"/>
             <p14:sldId id="272"/>

--- a/en/slides/10-Computer_Architecture-Electronics.pptx
+++ b/en/slides/10-Computer_Architecture-Electronics.pptx
@@ -126,13 +126,13 @@
   <p:extLst>
     <p:ext uri="{521415D9-36F7-43E2-AB2F-B90AF26B5E84}">
       <p14:sectionLst xmlns:p14="http://schemas.microsoft.com/office/powerpoint/2010/main">
-        <p14:section name="Opening" id="{5d4a0b1d-e773-4690-92e8-aa921f27ddb1}">
+        <p14:section name="Opening" id="{d5756faf-b7e1-45c9-ce60-747cda90349b}">
           <p14:sldIdLst>
             <p14:sldId id="256"/>
             <p14:sldId id="257"/>
           </p14:sldIdLst>
         </p14:section>
-        <p14:section name="Electricity in four quantities" id="{9fb69d49-2ac3-91ba-4db3-847e05c7281e}">
+        <p14:section name="Electricity in four quantities" id="{6f05f086-f9d6-3b9f-d807-e1a76e2384e6}">
           <p14:sldIdLst>
             <p14:sldId id="258"/>
             <p14:sldId id="259"/>
@@ -140,14 +140,14 @@
             <p14:sldId id="261"/>
           </p14:sldIdLst>
         </p14:section>
-        <p14:section name="Semiconductors" id="{e49f5d84-6f52-c34c-c723-7551f005695d}">
+        <p14:section name="Semiconductors" id="{388c38fc-8a69-5f37-8917-12b338f9431e}">
           <p14:sldIdLst>
             <p14:sldId id="262"/>
             <p14:sldId id="263"/>
             <p14:sldId id="264"/>
           </p14:sldIdLst>
         </p14:section>
-        <p14:section name="From volts to bits" id="{fe97efbd-09cc-c6f5-a2c5-42e093afc4a6}">
+        <p14:section name="From volts to bits" id="{115d417e-0826-7802-7402-3272309b6a1a}">
           <p14:sldIdLst>
             <p14:sldId id="265"/>
             <p14:sldId id="266"/>
@@ -157,7 +157,7 @@
             <p14:sldId id="270"/>
           </p14:sldIdLst>
         </p14:section>
-        <p14:section name="Back to the machine" id="{d2836125-e301-5b23-b56e-1312f5ad1ff1}">
+        <p14:section name="Back to the machine" id="{e32d6a27-a759-ea20-4603-ff84702baa6d}">
           <p14:sldIdLst>
             <p14:sldId id="271"/>
             <p14:sldId id="272"/>
@@ -570,7 +570,7 @@
           <a:p>
             <a:r>
               <a:rPr lang="en-US" dirty="0"/>
-              <a:t>So far a gate has been a symbol and a truth table. This lecture gives it a body. It follows one bit, the bit of a button of the kit, from the finger that presses it to the register that your program reads, and along the way explains what a volt is, what a transistor does, and how two transistors make a NOT. No previous knowledge of physics is assumed. The quotation by Clarke is the feeling to dispel: a chip looks like magic only until you see what it is made of.
+              <a:t>Until now a gate has been a symbol and a truth table; this lecture gives it a physical body. It follows a single bit, that of a button of the kit, from the finger that presses it to the register the program reads, explaining along the way what a volt is, what a transistor does, and how two transistors make a NOT gate. No prior knowledge of physics is assumed. The epigraph by Arthur C. Clarke names the impression the lecture sets out to dispel: a chip appears to be magic only until one sees what it is made of.
 Learning status: UNDERSTAND NOW, by the end of this lecture you explain it, trace it and apply it on your own; USE NOW, you follow and use the recipe today; how it works inside is explained later, or is not part of the course; UNDERSTAND LATER, recognise the name and what it is for; a later lecture explains it. A slide without a badge is context: a story, an example, a question, an exercise.
 Learning status of this lecture. UNDERSTAND NOW: pull-up inputs; voltage, current, Ohm's law; the transistor as a switch; from volts to bits; CMOS gates. USE NOW: the complete program, the PRG32 tools (used, not studied, in this course). UNDERSTAND LATER: the clock (Lecture 13). A slide without a badge is context: a story, an example, a question, an exercise.
 For the lecturer: New lecture for 2026/27, placed between Boolean algebra and combinational machines. It gives the gates of Lectures 08 and 09 a physical body before Lecture 11 composes them into machines. Spiral: the button of the kit, read since the first labs, is followed from the finger to the bit. No previous knowledge of physics is assumed; numbers for the kit are from the ESP32-C6 datasheet (table 5-4) and from the PRG32 hardware documentation.</a:t>
@@ -661,7 +661,7 @@
           <a:p>
             <a:r>
               <a:rPr lang="en-US" dirty="0"/>
-              <a:t>A digital circuit does not use exact voltages: it uses two ranges. The figure shows them for the kit. An output guarantees clean levels: above 2.64 V for a 1, below 0.33 V for a 0. An input is more tolerant: it reads 1 above 2.475 V and 0 below 0.825 V. The difference between what an output guarantees and what an input requires is the noise margin: a disturbance smaller than that cannot change the bit. Between the two input thresholds the value is undefined, and signals must cross that band quickly.
+              <a:t>A digital circuit does not use exact voltages but two ranges, shown in the figure for the kit. An output guarantees clean levels: above 2.64 V for a 1, below 0.33 V for a 0. An input is more tolerant: it reads 1 above 2.475 V and 0 below 0.825 V. The difference between what an output guarantees and what an input requires is the noise margin: a disturbance smaller than the margin cannot alter the bit. Between the two input thresholds the logical value is undefined, and signals must traverse that band quickly.
 UNDERSTAND NOW: from volts to bits.
 For the lecturer: ESP32-C6 datasheet, table 5-4, with VDD = 3.3 V: VOH min 0.8 VDD, VOL max 0.1 VDD, VIH min 0.75 VDD, VIL max 0.25 VDD. Noise margins: 2.64 - 2.475 = 0.165 V high, 0.825 - 0.33 = 0.495 V low. This is the threshold 'half of the supply voltage' of Lecture 13, made precise.</a:t>
             </a:r>
@@ -751,7 +751,7 @@
           <a:p>
             <a:r>
               <a:rPr lang="en-US" dirty="0"/>
-              <a:t>Why give up the richness of analog signals? In an analog circuit the exact value is the information, so every stage adds a little noise, and the noise accumulates: each copy is worse than the previous one. In a digital circuit only the range matters, and every gate produces a fresh, clean level: noise does not accumulate, copies are perfect, and errors can even be detected and corrected. Analog circuits remain indispensable at the edges of a system, where it touches the world: sensors, radio, sound.
+              <a:t>Why renounce the richness of analog signals? In an analog circuit the exact value is the information, so every stage adds a little noise and the noise accumulates: each copy is worse than its predecessor. In a digital circuit only the range matters, and every gate regenerates a fresh, clean level: noise does not accumulate, copies are perfect, and errors can even be detected and corrected, as Lecture 11 shows with parity. Analog circuits remain indispensable at the boundaries of a system, where it meets the physical world: sensors, radio, sound.
 UNDERSTAND NOW: from volts to bits.
 For the lecturer: The analog-to-digital story of Lecture 04, seen from the wire. The audio amplifier and the radio of the kit are the analog edges of an otherwise digital system.</a:t>
             </a:r>
@@ -841,7 +841,7 @@
           <a:p>
             <a:r>
               <a:rPr lang="en-US" dirty="0"/>
-              <a:t>The first gate. One pMOS connects the output to the supply, one nMOS connects it to ground, and both gates are driven by the same input. With the input at 0 the pMOS conducts and the output is 1; with the input at 1 the nMOS conducts and the output is 0. It is a NOT. Exactly one of the two transistors conducts at any time, so no current flows from supply to ground when the input is still: this is why CMOS consumes almost nothing at rest.
+              <a:t>The first gate. A pMOS connects the output to the supply, an nMOS connects it to ground, and both gates are driven by the same input. With the input at 0 the pMOS conducts and the output is 1; with the input at 1 the nMOS conducts and the output is 0. The circuit is a NOT. At any steady input exactly one of the two transistors conducts, so no current flows from supply to ground at rest: this is why CMOS consumes almost no static power, and the reason for its universal adoption.
 UNDERSTAND NOW: CMOS gates.
 For the lecturer: CMOS: complementary MOS. Y = A'. The pull-up network (pMOS) and the pull-down network (nMOS) are each other's dual, as in the duality principle of Lecture 08.</a:t>
             </a:r>
@@ -931,7 +931,7 @@
           <a:p>
             <a:r>
               <a:rPr lang="en-US" dirty="0"/>
-              <a:t>Two inputs, four transistors. In the NAND the two nMOS are in series: the output reaches ground only if A and B are both 1. The two pMOS are in parallel: the output reaches the supply if either input is 0. Series is AND, parallel is OR. The NOR is the dual: series and parallel are exchanged, exactly as De Morgan's laws exchange AND and OR. Check both drawings yourself for the four combinations of the inputs, marking which transistors conduct.
+              <a:t>Two inputs, four transistors. In the NAND the two nMOS are in series: the output is connected to ground only if A and B are both 1. The two pMOS are in parallel: the output is connected to the supply if either input is 0. Series realises AND, parallel realises OR. The NOR is the dual circuit, with series and parallel interchanged, exactly as De Morgan's laws interchange AND and OR. Both drawings should be checked for the four input combinations, marking which transistors conduct in each case.
 UNDERSTAND NOW: CMOS gates.
 For the lecturer: Series is AND, parallel is OR: the switching-circuit idea of Nakajima and Shannon (Lecture 03). Four transistors each. Ask the class to check the four input combinations on the drawing.</a:t>
             </a:r>
@@ -1021,7 +1021,7 @@
           <a:p>
             <a:r>
               <a:rPr lang="en-US" dirty="0"/>
-              <a:t>The cost of circuits in transistors. A NOT costs 2, a NAND or a NOR 4, an AND or an OR 6, because they are a NAND or a NOR followed by an inverter. This reverses the intuition of the algebra: in CMOS the inverting gates come first, and an AND is more expensive than a NAND. A full adder needs about 28 transistors, a memory cell 6, a flip-flop about 20. Now the purpose of minimisation is concrete: fewer literals mean fewer transistors, less area, less energy and less time.
+              <a:t>The cost of circuits measured in transistors. A NOT costs 2, a NAND or a NOR 4, an AND or an OR 6, because each is a NAND or NOR followed by an inverter. This reverses the intuition suggested by the algebra: in CMOS the inverting gates are the primitive ones, and an AND is more expensive than a NAND. A full adder requires about 28 transistors, a memory cell 6, a flip-flop about 20. The purpose of minimisation now becomes concrete: fewer literals mean fewer transistors, and hence less area, less energy and less delay.
 UNDERSTAND NOW: CMOS gates.
 For the lecturer: This is why NAND is the universal gate of Lecture 09 in practice as well as in theory: an AND costs more than a NAND. Counts are for conventional static CMOS and vary with the design style. Thirty-two full adders: about 900 transistors for the adder behind the add instruction.</a:t>
             </a:r>
@@ -1111,7 +1111,7 @@
           <a:p>
             <a:r>
               <a:rPr lang="en-US" dirty="0"/>
-              <a:t>The output of a gate drives the inputs of other gates, which are small capacitors. To change level it must charge or discharge them through the resistance of its own transistors, and this takes time: the propagation delay. It also takes energy, at every change of level. The power spent in switching is about C times V squared times f: the capacitance, the square of the supply voltage, and the frequency. Lowering the voltage saves the most, which is why chips moved from 5 V to about 1 V inside. Speed is paid for in heat.
+              <a:t>The output of a gate drives the inputs of other gates, which are small capacitors. To change level it must charge or discharge them through the resistance of its own transistors, which takes time, the propagation delay, and energy, at every transition. The dynamic power is approximately C times V^2 times f: capacitance, the square of the supply voltage, and the switching frequency. Reducing the voltage yields the largest saving, which is why internal supply voltages fell from 5 V to about 1 V. Speed is paid for in heat. The propagation delay reappears in Lecture 11 as the critical path and in Lecture 13 as the reason for the clock.
 UNDERSTAND NOW: CMOS gates. UNDERSTAND LATER: the clock (studied in Lecture 13).
 For the lecturer: C the switched capacitance, V the supply, f the switching frequency. The propagation delay returns in Lecture 11 as the critical path, and in Lecture 13 as the reason for the clock. The ESP32-C6 has a 3.3 V supply for its pins and a lower internal voltage for its logic.</a:t>
             </a:r>
@@ -1201,7 +1201,7 @@
           <a:p>
             <a:r>
               <a:rPr lang="en-US" dirty="0"/>
-              <a:t>An input connected to nothing is floating: it picks up noise and reads 0 or 1 at random. The remedy is a pull-up resistor that ties the pin to 3.3 V. With the button released no current flows, and the pin reads a clean 1. With the button pressed the switch joins the pin to ground: 0 V, a clean 0, and a negligible current of 73 microamperes flows through the resistor. It is a voltage divider whose lower resistor is either infinite or zero. The firmware then inverts the bit, so that in your program pressed is 1.
+              <a:t>An input connected to nothing is floating: it picks up noise and reads 0 or 1 unpredictably. The remedy is a pull-up resistor that ties the pin to 3.3 V. With the button released no current flows, and the pin reads a clean 1. With the button pressed the switch connects the pin to ground: 0 V, a clean 0, while a negligible current of 73 microamperes flows through the resistor. The circuit is a voltage divider whose lower resistance is either infinite or zero. The firmware then inverts the bit, so that in the program "pressed" reads as 1. The warm-up is thereby explained completely.
 UNDERSTAND NOW: pull-up inputs.
 For the lecturer: Internal weak pull-up of the ESP32-C6: 45 kΩ typical (datasheet). The firmware enables it on every button pin (prg32_input.c) and reads the pins inverted (prg32_controller.c). The triangle is the input buffer of the pin. This is called active-low logic.</a:t>
             </a:r>
@@ -1291,8 +1291,8 @@
           <a:p>
             <a:r>
               <a:rPr lang="en-US" dirty="0"/>
-              <a:t>Apply Ohm's law to the resistor, not to the whole circuit. The resistor sees the supply minus what the LED keeps: 3.3 minus 2. Divide that voltage by the current, in amperes: 5 mA is 0.005 A.
-With the input at 0, which of the two transistors has its gate at the level that makes it conduct? A pMOS conducts with a low gate, and it is the one connected to the supply. The two never conduct together, and the output is never left unconnected.
+              <a:t>For the first question, Ohm's law is applied to the resistor alone, not to the whole circuit. The resistor sees the supply minus what the LED retains, 3.3 - 2 V, and that voltage is divided by the current expressed in amperes: 5 mA is 0.005 A.
+For the second, one asks which of the two transistors has its gate at the level that makes it conduct when the input is 0. A pMOS conducts with a low gate, and it is the one connected to the supply. The two transistors never conduct together, and the output is never left unconnected.
 For the lecturer: 1. Answer: B. R = (3.3 - 2) / 0.005 = 260 Ω.
 2. Answer: B. A low gate closes the pMOS, which joins the output to the supply; the nMOS is open.</a:t>
             </a:r>
@@ -1382,8 +1382,8 @@
           <a:p>
             <a:r>
               <a:rPr lang="en-US" dirty="0"/>
-              <a:t>An AND in CMOS is not built directly: it is a NAND followed by an inverter. Add the transistors of the two.
-Think of the released button: the pin is connected to nothing. What would it read? The pull-up has nothing to do with the LED, with speed or with protection: it gives the input a defined level when the switch is open.
+              <a:t>For the first question: an AND is not built directly in CMOS but as a NAND followed by an inverter, so the transistors of the two are added.
+For the second, one considers the released button: the pin is then connected to nothing. What would it read? The pull-up is unrelated to the LED, to speed or to protection: it gives the input a defined level when the switch is open.
 For the lecturer: 1. Answer: C. A NAND (4) followed by an inverter (2).
 2. Answer: B. Without it the released pin would float; the pull-up ties it to 3.3 V, and the pressed switch overrides it to ground.</a:t>
             </a:r>
@@ -1473,7 +1473,7 @@
           <a:p>
             <a:r>
               <a:rPr lang="en-US" dirty="0"/>
-              <a:t>Fourteen terms. Note two false friends: voltage is in Italian tensione, and ground is massa. A capacitor is a condensatore. Gate, source and drain are not translated. The noise margin is the margine di rumore, and a floating input is an ingresso flottante.</a:t>
+              <a:t>Fourteen terms. Two false friends deserve note: voltage is tensione in Italian, and ground is massa. A capacitor is a condensatore. Gate, source and drain are not translated. The noise margin is the margine di rumore, and a floating input is an ingresso flottante.</a:t>
             </a:r>
             <a:endParaRPr lang="en-US" dirty="0"/>
           </a:p>
@@ -1561,7 +1561,7 @@
           <a:p>
             <a:r>
               <a:rPr lang="en-US" dirty="0"/>
-              <a:t>Six objectives. Use the four electrical quantities and Ohm's law on a simple circuit. Size the resistor of an LED and compute a voltage divider. Explain what a transistor is and how a MOS transistor works as a switch. Say how a voltage becomes a logic value, and what a noise margin is. Draw the inverter, the NAND and the NOR in CMOS and count their transistors. And explain pull-up resistors, floating inputs and why switching a gate takes time and energy.</a:t>
+              <a:t>Six learning outcomes. Applying the four electrical quantities and Ohm's law to a simple circuit. Sizing the resistor of an LED and computing a voltage divider. Explaining what a transistor is and how a MOS transistor operates as a switch. Stating how a voltage becomes a logic value, and what a noise margin is. Drawing the CMOS inverter, NAND and NOR and counting their transistors. And explaining pull-up resistors, floating inputs, and why switching a gate costs time and energy.</a:t>
             </a:r>
             <a:endParaRPr lang="en-US" dirty="0"/>
           </a:p>
@@ -1649,7 +1649,7 @@
           <a:p>
             <a:r>
               <a:rPr lang="en-US" dirty="0"/>
-              <a:t>Five conclusions. Voltage pushes, current flows, resistance hinders, and Ohm's law covers most of what a digital designer needs. A MOS transistor is a switch controlled by a voltage, in two complementary types. A bit is a range of voltages, made reliable by noise margins and by the regeneration of levels. CMOS gates are pairs of switch networks, and the inverting ones are the cheapest. Switching costs time and energy. The next lecture builds machines out of these gates.
+              <a:t>Five conclusions. Voltage drives, current flows, resistance opposes, and Ohm's law covers most of what a digital designer needs. A MOS transistor is a voltage-controlled switch, available in two complementary types. A bit is a range of voltages, made reliable by noise margins and by the regeneration of levels at every gate. CMOS gates are pairs of complementary switch networks, and the inverting gates are the cheapest. Switching costs time and energy. The next lecture builds functional machines from these gates.
 Learning status, recap. UNDERSTAND NOW: pull-up inputs; voltage, current, Ohm's law; the transistor as a switch; from volts to bits; CMOS gates. USE NOW: the complete program, the PRG32 tools (used, not studied, in this course). UNDERSTAND LATER: the clock (Lecture 13). A slide without a badge is context: a story, an example, a question, an exercise.
 For the lecturer: Next lecture: combinational machines, built from these gates.</a:t>
             </a:r>
@@ -1739,7 +1739,7 @@
           <a:p>
             <a:r>
               <a:rPr lang="en-US" dirty="0"/>
-              <a:t>Four quantities, with the analogy of water in pipes. Voltage is the pressure that pushes; it is measured in volts and always between two points. Current is the flow, in amperes. Resistance is what hinders the flow, in ohms. Power is the work done each second, in watts. The last column ties each to the kit: 3.3 V of supply, about 10 mA through a lit LED, 45 kΩ inside each input pin. Remember the caption: when we say that a pin "is at 3.3 V", we mean with respect to ground, the common reference.
+              <a:t>Four quantities, introduced through the analogy of water in pipes. Voltage is the pressure that drives the flow; it is measured in volts and is always defined between two points. Current is the flow, in amperes. Resistance is the opposition to the flow, in ohms. Power is the work done per second, in watts. The last column relates each to the kit: a 3.3 V supply, about 10 mA through a lit LED, 45 kΩ inside each input pin. The caption fixes a convention: saying that a pin "is at 3.3 V" means 3.3 V with respect to ground, the common reference.
 UNDERSTAND NOW: voltage, current, Ohm's law.
 For the lecturer: Electric charge is carried by electrons; current is charge per second. A voltage is always between two points: when we say 'the pin is at 3.3 V' we mean with respect to ground, the common reference of the whole circuit. Prefixes: milli (m) 10^-3, micro (µ) 10^-6, kilo (k) 10^3, mega (M) 10^6.</a:t>
             </a:r>
@@ -1829,7 +1829,7 @@
           <a:p>
             <a:r>
               <a:rPr lang="en-US" dirty="0"/>
-              <a:t>Ohm's law: the voltage across a resistor equals its resistance times the current through it. A circuit is a closed loop, and the drawing shows the simplest useful one: a supply, a resistor and an LED. The LED keeps about 2 V for itself; the resistor takes the remaining 1.3 V and thereby fixes the current. For 10 mA you need 1.3 divided by 0.010, that is 130 Ω, and the nearest standard value is 150 Ω. Without the resistor the current would be far too large and the LED would burn.
+              <a:t>Ohm's law: the voltage across a resistor equals its resistance multiplied by the current through it. A circuit is a closed loop, and the drawing shows the simplest useful one: a supply, a resistor and an LED. The LED holds about 2 V across itself; the resistor takes the remaining 1.3 V and thereby determines the current. For 10 mA the resistance must be 1.3 / 0.010 = 130 Ω, and the nearest standard value is 150 Ω, which errs on the side of a smaller current. Without the resistor the current would be limited only by the supply and the LED would be destroyed.
 UNDERSTAND NOW: voltage, current, Ohm's law.
 For the lecturer: Georg Ohm, 1827. The forward voltage of an LED depends on its colour: about 1.8-2.2 V for red, about 3 V for blue and white. With 150 Ω the current is 1.3 / 150 = 8.7 mA.</a:t>
             </a:r>
@@ -1919,7 +1919,7 @@
           <a:p>
             <a:r>
               <a:rPr lang="en-US" dirty="0"/>
-              <a:t>Two ways of connecting resistors. In series the same current crosses both and the resistances add. In parallel the same voltage is across both and the total resistance is smaller than either. Two resistors in series form a voltage divider: the output, taken between them, is the supply multiplied by R2 over R1 plus R2. With equal resistors it is half the supply; if R2 is much smaller, the output is close to ground. Keep the divider in mind: it explains the button at the end of the lecture.
+              <a:t>Two ways of combining resistors. In series the same current flows through both and the resistances add. In parallel the same voltage appears across both and the combined resistance is smaller than either. Two resistors in series form a voltage divider: the output, taken at their junction, equals the supply multiplied by R2/(R1 + R2). With equal resistors it is half the supply; if R2 is much smaller than R1, the output approaches ground. The divider should be kept in mind, because it explains the button circuit at the end of the lecture.
 UNDERSTAND NOW: voltage, current, Ohm's law.
 For the lecturer: The divider is the key to the pull-up circuit at the end of the lecture: a button is a resistor that is either infinite (open) or nearly zero (closed). Parallel: 1/R = 1/R1 + 1/R2.</a:t>
             </a:r>
@@ -2009,7 +2009,7 @@
           <a:p>
             <a:r>
               <a:rPr lang="en-US" dirty="0"/>
-              <a:t>A capacitor stores charge as a tank stores water, and its voltage cannot change instantly: it has to be filled or emptied through a resistance. The time needed is of the order of R times C. For an input pin of the kit, 45 kΩ times 2 pF is 90 nanoseconds. Every wire and every input of a transistor is a small capacitor, and this is where the delay of a gate comes from. A capacitor that is charged or empty is also a way of storing one bit: you will meet it again in the memory lecture.
+              <a:t>A capacitor stores charge as a tank stores water, and its voltage cannot change instantaneously: it must be charged or discharged through a resistance. The time required is of the order of R times C, the time constant; after one time constant the voltage has covered about 63% of its excursion. For an input pin of the kit, 45 kΩ times 2 pF gives 90 nanoseconds. Every wire and every transistor input behaves as a small capacitor, and this is the physical origin of gate delay. A capacitor that is charged or discharged is also a means of storing a bit, as the DRAM cell of Lecture 15 shows.
 UNDERSTAND NOW: voltage, current, Ohm's law.
 For the lecturer: RC is the time constant: after RC the voltage has covered about 63% of the way. Pin capacitance of the ESP32-C6: 2 pF typical (datasheet). Wiring and the button add more, so the real figure is larger.</a:t>
             </a:r>
@@ -2099,7 +2099,7 @@
           <a:p>
             <a:r>
               <a:rPr lang="en-US" dirty="0"/>
-              <a:t>Conductors let charge flow; insulators do not. Semiconductors lie in between, and their conduction can be controlled. The control is obtained by doping: adding a few atoms of another element. In n-type silicon there are extra electrons, negative carriers; in p-type silicon there are missing electrons, called holes, which behave as positive carriers. Where a p region meets an n region there is a junction. A chip is a slice of silicon with billions of such regions, connected by layers of metal.
+              <a:t>Conductors permit the flow of charge; insulators prevent it. Semiconductors lie between the two, and their conductivity can be controlled. The control is achieved by doping: introducing a small number of atoms of another element. In n-type silicon there is an excess of electrons, which act as negative carriers; in p-type silicon there is a deficit of electrons, called holes, which behave as positive carriers. Where a p region meets an n region a junction is formed. A chip is a slice of silicon containing billions of such regions, interconnected by layers of metal.
 UNDERSTAND NOW: the transistor as a switch.
 For the lecturer: Silicon is the second most abundant element in the Earth's crust: sand. The whole industry rests on purifying it and doping it with extreme precision.</a:t>
             </a:r>
@@ -2189,7 +2189,7 @@
           <a:p>
             <a:r>
               <a:rPr lang="en-US" dirty="0"/>
-              <a:t>The history of the switch without moving parts, in six dates. The transistor of 1947 replaces the vacuum tube. The integrated circuit of 1958 puts several transistors on one piece of semiconductor. The MOS transistor of 1960 is small, simple to build and needs almost no control current. CMOS, in 1963, combines two complementary types so that power is drawn only when switching. In 1971 a whole processor fits on a chip with 2,300 transistors; today a chip holds tens of billions.
+              <a:t>The history of the switch without moving parts, in six dates. The transistor of 1947 replaces the vacuum tube. The integrated circuit of 1958 places several transistors on a single piece of semiconductor. The MOS transistor of 1960 is small, simple to manufacture and requires almost no control current. CMOS, in 1963, combines two complementary types so that power is consumed essentially only during switching. In 1971 a complete processor fits on one chip with 2,300 transistors; a contemporary chip holds tens of billions.
 UNDERSTAND NOW: the transistor as a switch.
 For the lecturer: A transistor is a device with three terminals in which a small signal on one controls the current between the other two. Used as an amplifier it made the radio portable; used as a switch it made the computer. Vacuum tubes and relays did the same job in the first computers of Lecture 03, a million times larger and slower.</a:t>
             </a:r>
@@ -2279,7 +2279,7 @@
           <a:p>
             <a:r>
               <a:rPr lang="en-US" dirty="0"/>
-              <a:t>A MOS transistor has three terminals: the gate controls whether current can pass between the other two, the source and the drain. There are two types, and the table says everything: an nMOS conducts when its gate is high; a pMOS conducts when its gate is low. They are complementary: what closes one opens the other. The gate is insulated, so it draws practically no current. One more fact will be needed shortly: an nMOS is good at connecting to ground, a pMOS at connecting to the supply.
+              <a:t>A MOS transistor has three terminals: the gate controls whether current may pass between the other two, the source and the drain. There are two types, and the table contains everything needed: an nMOS conducts when its gate is high, a pMOS when its gate is low. They are complementary, since the voltage that closes one opens the other. The gate is insulated and draws practically no current. One further fact will be needed shortly: an nMOS is effective at connecting a node to ground, a pMOS at connecting it to the supply.
 UNDERSTAND NOW: the transistor as a switch.
 For the lecturer: MOS: metal, oxide, semiconductor, the three layers of the gate. The small circle on the pMOS gate means, as on logic symbols, 'active when low'. Input current of an ESP32-C6 pin: at most 50 nA (datasheet).</a:t>
             </a:r>
@@ -3359,7 +3359,7 @@
                 <a:ea typeface="Calibri" pitchFamily="34" charset="-122"/>
                 <a:cs typeface="Calibri" pitchFamily="34" charset="-120"/>
               </a:rPr>
-              <a:t>10-Computer_Architecture-Electronics-Code.pptx</a:t>
+              <a:t>10-Computer_Architecture-Electronics-Lab.pptx</a:t>
             </a:r>
             <a:endParaRPr lang="en-US" sz="1300" dirty="0"/>
           </a:p>

--- a/en/slides/10-Computer_Architecture-Electronics.pptx
+++ b/en/slides/10-Computer_Architecture-Electronics.pptx
@@ -126,13 +126,13 @@
   <p:extLst>
     <p:ext uri="{521415D9-36F7-43E2-AB2F-B90AF26B5E84}">
       <p14:sectionLst xmlns:p14="http://schemas.microsoft.com/office/powerpoint/2010/main">
-        <p14:section name="Opening" id="{d5756faf-b7e1-45c9-ce60-747cda90349b}">
+        <p14:section name="Opening" id="{8223d87b-7817-7e84-2afc-11ab866baa8b}">
           <p14:sldIdLst>
             <p14:sldId id="256"/>
             <p14:sldId id="257"/>
           </p14:sldIdLst>
         </p14:section>
-        <p14:section name="Electricity in four quantities" id="{6f05f086-f9d6-3b9f-d807-e1a76e2384e6}">
+        <p14:section name="Electricity in four quantities" id="{71316cb5-1f1a-4ea1-8f69-1e46dde34a08}">
           <p14:sldIdLst>
             <p14:sldId id="258"/>
             <p14:sldId id="259"/>
@@ -140,14 +140,14 @@
             <p14:sldId id="261"/>
           </p14:sldIdLst>
         </p14:section>
-        <p14:section name="Semiconductors" id="{388c38fc-8a69-5f37-8917-12b338f9431e}">
+        <p14:section name="Semiconductors" id="{83f493c9-c088-a83c-e04d-cf5ee36d4e28}">
           <p14:sldIdLst>
             <p14:sldId id="262"/>
             <p14:sldId id="263"/>
             <p14:sldId id="264"/>
           </p14:sldIdLst>
         </p14:section>
-        <p14:section name="From volts to bits" id="{115d417e-0826-7802-7402-3272309b6a1a}">
+        <p14:section name="From volts to bits" id="{eea4f4fa-1865-22a2-e37c-b6e71dda5407}">
           <p14:sldIdLst>
             <p14:sldId id="265"/>
             <p14:sldId id="266"/>
@@ -157,7 +157,7 @@
             <p14:sldId id="270"/>
           </p14:sldIdLst>
         </p14:section>
-        <p14:section name="Back to the machine" id="{e32d6a27-a759-ea20-4603-ff84702baa6d}">
+        <p14:section name="Back to the machine" id="{5d3398df-9ae4-b0b2-7af1-5676f06431f6}">
           <p14:sldIdLst>
             <p14:sldId id="271"/>
             <p14:sldId id="272"/>
@@ -1021,7 +1021,7 @@
           <a:p>
             <a:r>
               <a:rPr lang="en-US" dirty="0"/>
-              <a:t>The cost of circuits measured in transistors. A NOT costs 2, a NAND or a NOR 4, an AND or an OR 6, because each is a NAND or NOR followed by an inverter. This reverses the intuition suggested by the algebra: in CMOS the inverting gates are the primitive ones, and an AND is more expensive than a NAND. A full adder requires about 28 transistors, a memory cell 6, a flip-flop about 20. The purpose of minimisation now becomes concrete: fewer literals mean fewer transistors, and hence less area, less energy and less delay.
+              <a:t>The cost of circuits measured in transistors. A NOT costs 2, a NAND or a NOR 4, an AND or an OR 6, because each is a NAND or NOR followed by an inverter. This reverses the intuition suggested by the algebra: in CMOS the inverting gates are the primitive ones, and an AND is more expensive than a NAND. A full adder requires about 28 transistors, a memory cell 6, a flip-flop, the one-bit memory element of Lecture 13, about 20. The purpose of minimisation now becomes concrete: fewer literals mean fewer transistors, and hence less area, less energy and less delay.
 UNDERSTAND NOW: CMOS gates.
 For the lecturer: This is why NAND is the universal gate of Lecture 09 in practice as well as in theory: an AND costs more than a NAND. Counts are for conventional static CMOS and vary with the design style. Thirty-two full adders: about 900 transistors for the adder behind the add instruction.</a:t>
             </a:r>

--- a/en/slides/10-Computer_Architecture-Electronics.pptx
+++ b/en/slides/10-Computer_Architecture-Electronics.pptx
@@ -126,13 +126,13 @@
   <p:extLst>
     <p:ext uri="{521415D9-36F7-43E2-AB2F-B90AF26B5E84}">
       <p14:sectionLst xmlns:p14="http://schemas.microsoft.com/office/powerpoint/2010/main">
-        <p14:section name="Opening" id="{8223d87b-7817-7e84-2afc-11ab866baa8b}">
+        <p14:section name="Opening" id="{c64d3312-5e42-2423-3715-b5abcccd6bdb}">
           <p14:sldIdLst>
             <p14:sldId id="256"/>
             <p14:sldId id="257"/>
           </p14:sldIdLst>
         </p14:section>
-        <p14:section name="Electricity in four quantities" id="{71316cb5-1f1a-4ea1-8f69-1e46dde34a08}">
+        <p14:section name="Electricity in four quantities" id="{1df0aeee-5611-2570-4347-183f0f9cc515}">
           <p14:sldIdLst>
             <p14:sldId id="258"/>
             <p14:sldId id="259"/>
@@ -140,14 +140,14 @@
             <p14:sldId id="261"/>
           </p14:sldIdLst>
         </p14:section>
-        <p14:section name="Semiconductors" id="{83f493c9-c088-a83c-e04d-cf5ee36d4e28}">
+        <p14:section name="Semiconductors" id="{f6253b39-2d86-8149-8d34-c1e70c42da0f}">
           <p14:sldIdLst>
             <p14:sldId id="262"/>
             <p14:sldId id="263"/>
             <p14:sldId id="264"/>
           </p14:sldIdLst>
         </p14:section>
-        <p14:section name="From volts to bits" id="{eea4f4fa-1865-22a2-e37c-b6e71dda5407}">
+        <p14:section name="From volts to bits" id="{753998ed-2696-724b-6489-990a60abda57}">
           <p14:sldIdLst>
             <p14:sldId id="265"/>
             <p14:sldId id="266"/>
@@ -157,7 +157,7 @@
             <p14:sldId id="270"/>
           </p14:sldIdLst>
         </p14:section>
-        <p14:section name="Back to the machine" id="{5d3398df-9ae4-b0b2-7af1-5676f06431f6}">
+        <p14:section name="Back to the machine" id="{75eb9287-4467-c348-0328-fc2c1db62962}">
           <p14:sldIdLst>
             <p14:sldId id="271"/>
             <p14:sldId id="272"/>
@@ -573,6 +573,8 @@
               <a:t>Until now a gate has been a symbol and a truth table; this lecture gives it a physical body. It follows a single bit, that of a button of the kit, from the finger that presses it to the register the program reads, explaining along the way what a volt is, what a transistor does, and how two transistors make a NOT gate. No prior knowledge of physics is assumed. The epigraph by Arthur C. Clarke names the impression the lecture sets out to dispel: a chip appears to be magic only until one sees what it is made of.
 Learning status: UNDERSTAND NOW, by the end of this lecture you explain it, trace it and apply it on your own; USE NOW, you follow and use the recipe today; how it works inside is explained later, or is not part of the course; UNDERSTAND LATER, recognise the name and what it is for; a later lecture explains it. A slide without a badge is context: a story, an example, a question, an exercise.
 Learning status of this lecture. UNDERSTAND NOW: pull-up inputs; voltage, current, Ohm's law; the transistor as a switch; from volts to bits; CMOS gates. USE NOW: the complete program, the PRG32 tools (used, not studied, in this course). UNDERSTAND LATER: the clock (Lecture 13). A slide without a badge is context: a story, an example, a question, an exercise.
+Roadmap. Today's outcomes: (1) explain how a MOS transistor works as a switch and how CMOS builds a gate; (2) read logic levels and noise margins from voltages; (3) size the resistor of an LED and explain the pull-up of a button. Builds on: only what Lecture 01 set up. Next: Lecture 11, Combinational Machines.
+Bridge. In Lecture 02 the counter survived from one frame to the next in memory, not in a register. Today a memory cell costs about 6 transistors and a flip-flop about 20: remembering a bit is a circuit. Lecture 13 shows how latches and flip-flops keep a bit. Recall: Where did the counter of Lecture 02 live between two frames, and why not in t1?
 For the lecturer: New lecture for 2026/27, placed between Boolean algebra and combinational machines. It gives the gates of Lectures 08 and 09 a physical body before Lecture 11 composes them into machines. Spiral: the button of the kit, read since the first labs, is followed from the finger to the bit. No previous knowledge of physics is assumed; numbers for the kit are from the ESP32-C6 datasheet (table 5-4) and from the PRG32 hardware documentation.</a:t>
             </a:r>
             <a:endParaRPr lang="en-US" dirty="0"/>
@@ -1650,7 +1652,7 @@
             <a:r>
               <a:rPr lang="en-US" dirty="0"/>
               <a:t>Five conclusions. Voltage drives, current flows, resistance opposes, and Ohm's law covers most of what a digital designer needs. A MOS transistor is a voltage-controlled switch, available in two complementary types. A bit is a range of voltages, made reliable by noise margins and by the regeneration of levels at every gate. CMOS gates are pairs of complementary switch networks, and the inverting gates are the cheapest. Switching costs time and energy. The next lecture builds functional machines from these gates.
-Learning status, recap. UNDERSTAND NOW: pull-up inputs; voltage, current, Ohm's law; the transistor as a switch; from volts to bits; CMOS gates. USE NOW: the complete program, the PRG32 tools (used, not studied, in this course). UNDERSTAND LATER: the clock (Lecture 13). A slide without a badge is context: a story, an example, a question, an exercise.
+Learning status, recap. UNDERSTAND NOW: pull-up inputs; voltage, current, Ohm's law; the transistor as a switch; from volts to bits; CMOS gates. USE NOW: the complete program, the PRG32 tools (used, not studied, in this course). UNDERSTAND LATER: the clock (Lecture 13). A slide without a badge is context: a story, an example, a question, an exercise. Closing thread: A bit is a voltage inside a guaranteed range, and a gate is a few switches: the button of the kit is now a circuit you understand. Next: the machines built from gates. Exit ticket (two to four minutes, alone, on paper): 1. In two sentences: how does a MOS transistor act as a switch, and why does a CMOS inverter draw almost no current when its input is steady? 2. On the kit an input reads 1 above 2.475 V and 0 below 0.825 V; an output gives a 1 above 2.64 V. A wire adds 0.1 V of noise downwards. Can a 1 be misread? What does an input read at 1.6 V?
 For the lecturer: Next lecture: combinational machines, built from these gates.</a:t>
             </a:r>
             <a:endParaRPr lang="en-US" dirty="0"/>
